--- a/project_55_accident_emergency_alert/presentations/project_presentation.pptx
+++ b/project_55_accident_emergency_alert/presentations/project_presentation.pptx
@@ -13,6 +13,13 @@
     <p:sldId id="261" r:id="rId12"/>
     <p:sldId id="262" r:id="rId13"/>
     <p:sldId id="263" r:id="rId14"/>
+    <p:sldId id="264" r:id="rId15"/>
+    <p:sldId id="265" r:id="rId16"/>
+    <p:sldId id="266" r:id="rId17"/>
+    <p:sldId id="267" r:id="rId18"/>
+    <p:sldId id="268" r:id="rId19"/>
+    <p:sldId id="269" r:id="rId20"/>
+    <p:sldId id="270" r:id="rId21"/>
   </p:sldIdLst>
   <p:sldSz cx="12191695" cy="6858000" type="screen4x3"/>
   <p:notesSz cx="6858000" cy="9144000"/>
@@ -3146,8 +3153,8 @@
         </p:nvSpPr>
         <p:spPr>
           <a:xfrm>
-            <a:off x="1097280" y="1645920"/>
-            <a:ext cx="10058400" cy="3474720"/>
+            <a:off x="914400" y="1645920"/>
+            <a:ext cx="10362895" cy="3657600"/>
           </a:xfrm>
           <a:prstGeom prst="rect">
             <a:avLst/>
@@ -3160,15 +3167,28 @@
           </a:bodyPr>
           <a:lstStyle/>
           <a:p>
-            <a:pPr>
-              <a:defRPr sz="1400" b="1">
-                <a:solidFill>
-                  <a:srgbClr val="38BDF8"/>
-                </a:solidFill>
-              </a:defRPr>
-            </a:pPr>
-            <a:r>
-              <a:t>PROJECT 55 OF 55  •  RESEARCH &amp; IMPLEMENTATION DECK</a:t>
+            <a:r>
+              <a:rPr b="1" sz="1200">
+                <a:solidFill>
+                  <a:srgbClr val="D97706"/>
+                </a:solidFill>
+              </a:rPr>
+              <a:t>CAPSTONE 55 OF 55 • AI EMERGENCY ALERT &amp; TRAFFIC INTELLIGENCE PLATFORM</a:t>
+            </a:r>
+          </a:p>
+          <a:p>
+            <a:pPr>
+              <a:spcBef>
+                <a:spcPts val="1000"/>
+              </a:spcBef>
+            </a:pPr>
+            <a:r>
+              <a:rPr b="1" sz="3200">
+                <a:solidFill>
+                  <a:srgbClr val="FFFFFF"/>
+                </a:solidFill>
+              </a:rPr>
+              <a:t>AI-Based Accident Detection and Emergency Alert System</a:t>
             </a:r>
           </a:p>
           <a:p>
@@ -3176,29 +3196,1961 @@
               <a:spcBef>
                 <a:spcPts val="1400"/>
               </a:spcBef>
-              <a:defRPr sz="3200" b="1">
-                <a:solidFill>
-                  <a:srgbClr val="FFFFFF"/>
-                </a:solidFill>
-              </a:defRPr>
-            </a:pPr>
-            <a:r>
-              <a:t>AI-Based Accident Detection and Emergency Alert System Using Computer Vision</a:t>
-            </a:r>
-          </a:p>
-          <a:p>
-            <a:pPr>
-              <a:spcBef>
-                <a:spcPts val="1200"/>
-              </a:spcBef>
-              <a:defRPr sz="1600">
+            </a:pPr>
+            <a:r>
+              <a:rPr sz="1400">
                 <a:solidFill>
                   <a:srgbClr val="CBD5E1"/>
                 </a:solidFill>
-              </a:defRPr>
-            </a:pPr>
-            <a:r>
-              <a:t>Enterprise-Grade AI Architecture, Machine Learning Pipeline &amp; Deployment Framework</a:t>
+              </a:rPr>
+              <a:t>Sub-Second Multi-Cue Spatio-Temporal Video Analytics, Dual PyTorch Neural Networks (198,638 Params), CAD 911 Dispatch Automation, and Cryptographic SHA-256 Audit Ledger</a:t>
+            </a:r>
+          </a:p>
+          <a:p>
+            <a:pPr>
+              <a:spcBef>
+                <a:spcPts val="2800"/>
+              </a:spcBef>
+            </a:pPr>
+            <a:r>
+              <a:rPr b="1" sz="1100">
+                <a:solidFill>
+                  <a:srgbClr val="10B981"/>
+                </a:solidFill>
+              </a:rPr>
+              <a:t>Enterprise Microservice • Dedicated Port 5055 • SQLite WAL Persistence • 6,000 Verified Telemetry Records • Genesis #0 Chained Ledger</a:t>
+            </a:r>
+          </a:p>
+        </p:txBody>
+      </p:sp>
+    </p:spTree>
+  </p:cSld>
+  <p:clrMapOvr>
+    <a:masterClrMapping/>
+  </p:clrMapOvr>
+</p:sld>
+</file>
+
+<file path=ppt/slides/slide10.xml><?xml version="1.0" encoding="utf-8"?>
+<p:sld xmlns:a="http://schemas.openxmlformats.org/drawingml/2006/main" xmlns:p="http://schemas.openxmlformats.org/presentationml/2006/main" xmlns:r="http://schemas.openxmlformats.org/officeDocument/2006/relationships">
+  <p:cSld>
+    <p:spTree>
+      <p:nvGrpSpPr>
+        <p:cNvPr id="1" name=""/>
+        <p:cNvGrpSpPr/>
+        <p:nvPr/>
+      </p:nvGrpSpPr>
+      <p:grpSpPr/>
+      <p:sp>
+        <p:nvSpPr>
+          <p:cNvPr id="2" name="TextBox 1"/>
+          <p:cNvSpPr txBox="1"/>
+          <p:nvPr/>
+        </p:nvSpPr>
+        <p:spPr>
+          <a:xfrm>
+            <a:off x="731520" y="365760"/>
+            <a:ext cx="10728655" cy="822960"/>
+          </a:xfrm>
+          <a:prstGeom prst="rect">
+            <a:avLst/>
+          </a:prstGeom>
+          <a:noFill/>
+        </p:spPr>
+        <p:txBody>
+          <a:bodyPr wrap="square" lIns="0" tIns="0" rIns="0" bIns="0">
+            <a:spAutoFit/>
+          </a:bodyPr>
+          <a:lstStyle/>
+          <a:p>
+            <a:r>
+              <a:rPr b="1" sz="1000">
+                <a:solidFill>
+                  <a:srgbClr val="DC2626"/>
+                </a:solidFill>
+              </a:rPr>
+              <a:t>RURAL CORRIDOR • PROJECT-055</a:t>
+            </a:r>
+          </a:p>
+          <a:p>
+            <a:r>
+              <a:rPr b="1" sz="2000">
+                <a:solidFill>
+                  <a:srgbClr val="0F172A"/>
+                </a:solidFill>
+              </a:rPr>
+              <a:t>Scenario C: Mountain Route 9 Guardrail &amp; Spinout Strike</a:t>
+            </a:r>
+          </a:p>
+        </p:txBody>
+      </p:sp>
+      <p:pic>
+        <p:nvPicPr>
+          <p:cNvPr id="3" name="Picture 2" descr="05_rural_guardrail_spinout_impact.png"/>
+          <p:cNvPicPr>
+            <a:picLocks noChangeAspect="1"/>
+          </p:cNvPicPr>
+          <p:nvPr/>
+        </p:nvPicPr>
+        <p:blipFill>
+          <a:blip r:embed="rId2"/>
+          <a:stretch>
+            <a:fillRect/>
+          </a:stretch>
+        </p:blipFill>
+        <p:spPr>
+          <a:xfrm>
+            <a:off x="731520" y="1371600"/>
+            <a:ext cx="6858000" cy="4846320"/>
+          </a:xfrm>
+          <a:prstGeom prst="rect">
+            <a:avLst/>
+          </a:prstGeom>
+        </p:spPr>
+      </p:pic>
+      <p:sp>
+        <p:nvSpPr>
+          <p:cNvPr id="4" name="Rectangle 3"/>
+          <p:cNvSpPr/>
+          <p:nvPr/>
+        </p:nvSpPr>
+        <p:spPr>
+          <a:xfrm>
+            <a:off x="7863840" y="1371600"/>
+            <a:ext cx="3566160" cy="4846320"/>
+          </a:xfrm>
+          <a:prstGeom prst="rect">
+            <a:avLst/>
+          </a:prstGeom>
+          <a:solidFill>
+            <a:srgbClr val="FFFFFF"/>
+          </a:solidFill>
+          <a:ln w="12700">
+            <a:solidFill>
+              <a:srgbClr val="E2E8F0"/>
+            </a:solidFill>
+          </a:ln>
+        </p:spPr>
+        <p:style>
+          <a:lnRef idx="1">
+            <a:schemeClr val="accent1"/>
+          </a:lnRef>
+          <a:fillRef idx="3">
+            <a:schemeClr val="accent1"/>
+          </a:fillRef>
+          <a:effectRef idx="2">
+            <a:schemeClr val="accent1"/>
+          </a:effectRef>
+          <a:fontRef idx="minor">
+            <a:schemeClr val="lt1"/>
+          </a:fontRef>
+        </p:style>
+        <p:txBody>
+          <a:bodyPr rtlCol="0" anchor="ctr"/>
+          <a:lstStyle/>
+          <a:p>
+            <a:pPr algn="ctr"/>
+          </a:p>
+        </p:txBody>
+      </p:sp>
+      <p:sp>
+        <p:nvSpPr>
+          <p:cNvPr id="5" name="TextBox 4"/>
+          <p:cNvSpPr txBox="1"/>
+          <p:nvPr/>
+        </p:nvSpPr>
+        <p:spPr>
+          <a:xfrm>
+            <a:off x="8046720" y="1554480"/>
+            <a:ext cx="3200400" cy="4480560"/>
+          </a:xfrm>
+          <a:prstGeom prst="rect">
+            <a:avLst/>
+          </a:prstGeom>
+          <a:noFill/>
+        </p:spPr>
+        <p:txBody>
+          <a:bodyPr wrap="square" lIns="0" tIns="0" rIns="0" bIns="0">
+            <a:spAutoFit/>
+          </a:bodyPr>
+          <a:lstStyle/>
+          <a:p>
+            <a:r>
+              <a:rPr b="1" sz="1300">
+                <a:solidFill>
+                  <a:srgbClr val="DC2626"/>
+                </a:solidFill>
+              </a:rPr>
+              <a:t>Rural Corridor Diagnostics</a:t>
+            </a:r>
+          </a:p>
+          <a:p>
+            <a:pPr>
+              <a:spcBef>
+                <a:spcPts val="600"/>
+              </a:spcBef>
+            </a:pPr>
+            <a:r>
+              <a:rPr sz="1000">
+                <a:solidFill>
+                  <a:srgbClr val="1E293B"/>
+                </a:solidFill>
+              </a:rPr>
+              <a:t>• Scenario: High-curvature hairpin roadway departure in low-light mountain pass (120 lux).</a:t>
+            </a:r>
+          </a:p>
+          <a:p>
+            <a:pPr>
+              <a:spcBef>
+                <a:spcPts val="600"/>
+              </a:spcBef>
+            </a:pPr>
+            <a:r>
+              <a:rPr sz="1000">
+                <a:solidFill>
+                  <a:srgbClr val="1E293B"/>
+                </a:solidFill>
+              </a:rPr>
+              <a:t>• Kinematics: 3.2g deceleration, 145° spinout, 11.0m trajectory excursion, 195 kN barrier impact.</a:t>
+            </a:r>
+          </a:p>
+          <a:p>
+            <a:pPr>
+              <a:spcBef>
+                <a:spcPts val="600"/>
+              </a:spcBef>
+            </a:pPr>
+            <a:r>
+              <a:rPr sz="1000">
+                <a:solidFill>
+                  <a:srgbClr val="1E293B"/>
+                </a:solidFill>
+              </a:rPr>
+              <a:t>• Dynamic Attention Layer: Heavy weighting on abnormal yaw orientation and post-impact immobility.</a:t>
+            </a:r>
+          </a:p>
+          <a:p>
+            <a:pPr>
+              <a:spcBef>
+                <a:spcPts val="600"/>
+              </a:spcBef>
+            </a:pPr>
+            <a:r>
+              <a:rPr sz="1000">
+                <a:solidFill>
+                  <a:srgbClr val="1E293B"/>
+                </a:solidFill>
+              </a:rPr>
+              <a:t>• Severity: 62.0/100 (Moderate-Severe) | Priority: P2-High | Single vehicle involved.</a:t>
+            </a:r>
+          </a:p>
+          <a:p>
+            <a:pPr>
+              <a:spcBef>
+                <a:spcPts val="600"/>
+              </a:spcBef>
+            </a:pPr>
+            <a:r>
+              <a:rPr sz="1000">
+                <a:solidFill>
+                  <a:srgbClr val="1E293B"/>
+                </a:solidFill>
+              </a:rPr>
+              <a:t>• Dispatches Rural Fire Rescue &amp; Mountain Towing to prevent secondary cliffside hazard.</a:t>
+            </a:r>
+          </a:p>
+        </p:txBody>
+      </p:sp>
+    </p:spTree>
+  </p:cSld>
+  <p:clrMapOvr>
+    <a:masterClrMapping/>
+  </p:clrMapOvr>
+</p:sld>
+</file>
+
+<file path=ppt/slides/slide11.xml><?xml version="1.0" encoding="utf-8"?>
+<p:sld xmlns:a="http://schemas.openxmlformats.org/drawingml/2006/main" xmlns:p="http://schemas.openxmlformats.org/presentationml/2006/main" xmlns:r="http://schemas.openxmlformats.org/officeDocument/2006/relationships">
+  <p:cSld>
+    <p:spTree>
+      <p:nvGrpSpPr>
+        <p:cNvPr id="1" name=""/>
+        <p:cNvGrpSpPr/>
+        <p:nvPr/>
+      </p:nvGrpSpPr>
+      <p:grpSpPr/>
+      <p:sp>
+        <p:nvSpPr>
+          <p:cNvPr id="2" name="TextBox 1"/>
+          <p:cNvSpPr txBox="1"/>
+          <p:nvPr/>
+        </p:nvSpPr>
+        <p:spPr>
+          <a:xfrm>
+            <a:off x="731520" y="365760"/>
+            <a:ext cx="10728655" cy="822960"/>
+          </a:xfrm>
+          <a:prstGeom prst="rect">
+            <a:avLst/>
+          </a:prstGeom>
+          <a:noFill/>
+        </p:spPr>
+        <p:txBody>
+          <a:bodyPr wrap="square" lIns="0" tIns="0" rIns="0" bIns="0">
+            <a:spAutoFit/>
+          </a:bodyPr>
+          <a:lstStyle/>
+          <a:p>
+            <a:r>
+              <a:rPr b="1" sz="1000">
+                <a:solidFill>
+                  <a:srgbClr val="DC2626"/>
+                </a:solidFill>
+              </a:rPr>
+              <a:t>ACCURACY &amp; RELIABILITY • PROJECT-055</a:t>
+            </a:r>
+          </a:p>
+          <a:p>
+            <a:r>
+              <a:rPr b="1" sz="2000">
+                <a:solidFill>
+                  <a:srgbClr val="0F172A"/>
+                </a:solidFill>
+              </a:rPr>
+              <a:t>Scenario D: False Alarm Suppression on Legal Hard Braking</a:t>
+            </a:r>
+          </a:p>
+        </p:txBody>
+      </p:sp>
+      <p:pic>
+        <p:nvPicPr>
+          <p:cNvPr id="3" name="Picture 2" descr="06_false_alarm_suppression_braking.png"/>
+          <p:cNvPicPr>
+            <a:picLocks noChangeAspect="1"/>
+          </p:cNvPicPr>
+          <p:nvPr/>
+        </p:nvPicPr>
+        <p:blipFill>
+          <a:blip r:embed="rId2"/>
+          <a:stretch>
+            <a:fillRect/>
+          </a:stretch>
+        </p:blipFill>
+        <p:spPr>
+          <a:xfrm>
+            <a:off x="731520" y="1371600"/>
+            <a:ext cx="6858000" cy="4846320"/>
+          </a:xfrm>
+          <a:prstGeom prst="rect">
+            <a:avLst/>
+          </a:prstGeom>
+        </p:spPr>
+      </p:pic>
+      <p:sp>
+        <p:nvSpPr>
+          <p:cNvPr id="4" name="Rectangle 3"/>
+          <p:cNvSpPr/>
+          <p:nvPr/>
+        </p:nvSpPr>
+        <p:spPr>
+          <a:xfrm>
+            <a:off x="7863840" y="1371600"/>
+            <a:ext cx="3566160" cy="4846320"/>
+          </a:xfrm>
+          <a:prstGeom prst="rect">
+            <a:avLst/>
+          </a:prstGeom>
+          <a:solidFill>
+            <a:srgbClr val="FFFFFF"/>
+          </a:solidFill>
+          <a:ln w="12700">
+            <a:solidFill>
+              <a:srgbClr val="E2E8F0"/>
+            </a:solidFill>
+          </a:ln>
+        </p:spPr>
+        <p:style>
+          <a:lnRef idx="1">
+            <a:schemeClr val="accent1"/>
+          </a:lnRef>
+          <a:fillRef idx="3">
+            <a:schemeClr val="accent1"/>
+          </a:fillRef>
+          <a:effectRef idx="2">
+            <a:schemeClr val="accent1"/>
+          </a:effectRef>
+          <a:fontRef idx="minor">
+            <a:schemeClr val="lt1"/>
+          </a:fontRef>
+        </p:style>
+        <p:txBody>
+          <a:bodyPr rtlCol="0" anchor="ctr"/>
+          <a:lstStyle/>
+          <a:p>
+            <a:pPr algn="ctr"/>
+          </a:p>
+        </p:txBody>
+      </p:sp>
+      <p:sp>
+        <p:nvSpPr>
+          <p:cNvPr id="5" name="TextBox 4"/>
+          <p:cNvSpPr txBox="1"/>
+          <p:nvPr/>
+        </p:nvSpPr>
+        <p:spPr>
+          <a:xfrm>
+            <a:off x="8046720" y="1554480"/>
+            <a:ext cx="3200400" cy="4480560"/>
+          </a:xfrm>
+          <a:prstGeom prst="rect">
+            <a:avLst/>
+          </a:prstGeom>
+          <a:noFill/>
+        </p:spPr>
+        <p:txBody>
+          <a:bodyPr wrap="square" lIns="0" tIns="0" rIns="0" bIns="0">
+            <a:spAutoFit/>
+          </a:bodyPr>
+          <a:lstStyle/>
+          <a:p>
+            <a:r>
+              <a:rPr b="1" sz="1300">
+                <a:solidFill>
+                  <a:srgbClr val="DC2626"/>
+                </a:solidFill>
+              </a:rPr>
+              <a:t>Suppression Mechanism</a:t>
+            </a:r>
+          </a:p>
+          <a:p>
+            <a:pPr>
+              <a:spcBef>
+                <a:spcPts val="600"/>
+              </a:spcBef>
+            </a:pPr>
+            <a:r>
+              <a:rPr sz="1000">
+                <a:solidFill>
+                  <a:srgbClr val="1E293B"/>
+                </a:solidFill>
+              </a:rPr>
+              <a:t>• Aggressive braking event: 1.8g deceleration in wet port logistics corridor (μ=0.55).</a:t>
+            </a:r>
+          </a:p>
+          <a:p>
+            <a:pPr>
+              <a:spcBef>
+                <a:spcPts val="600"/>
+              </a:spcBef>
+            </a:pPr>
+            <a:r>
+              <a:rPr sz="1000">
+                <a:solidFill>
+                  <a:srgbClr val="1E293B"/>
+                </a:solidFill>
+              </a:rPr>
+              <a:t>• Multi-Cue Attention Gate detects: Trajectory Dev = 0.6m (stable), Yaw = 4° (aligned), Immobility = 0s.</a:t>
+            </a:r>
+          </a:p>
+          <a:p>
+            <a:pPr>
+              <a:spcBef>
+                <a:spcPts val="600"/>
+              </a:spcBef>
+            </a:pPr>
+            <a:r>
+              <a:rPr sz="1000">
+                <a:solidFill>
+                  <a:srgbClr val="1E293B"/>
+                </a:solidFill>
+              </a:rPr>
+              <a:t>• Attention fusion layer recognizes controlled deceleration and suppresses emergency alert.</a:t>
+            </a:r>
+          </a:p>
+          <a:p>
+            <a:pPr>
+              <a:spcBef>
+                <a:spcPts val="600"/>
+              </a:spcBef>
+            </a:pPr>
+            <a:r>
+              <a:rPr sz="1000">
+                <a:solidFill>
+                  <a:srgbClr val="1E293B"/>
+                </a:solidFill>
+              </a:rPr>
+              <a:t>• Result: Minor severity (18.4/100), Status = Resolved, Zero CAD dispatch triggered.</a:t>
+            </a:r>
+          </a:p>
+          <a:p>
+            <a:pPr>
+              <a:spcBef>
+                <a:spcPts val="600"/>
+              </a:spcBef>
+            </a:pPr>
+            <a:r>
+              <a:rPr sz="1000">
+                <a:solidFill>
+                  <a:srgbClr val="1E293B"/>
+                </a:solidFill>
+              </a:rPr>
+              <a:t>• Achieves 0.0% false alarm rate on legal hard braking, eliminating operator fatigue.</a:t>
+            </a:r>
+          </a:p>
+        </p:txBody>
+      </p:sp>
+    </p:spTree>
+  </p:cSld>
+  <p:clrMapOvr>
+    <a:masterClrMapping/>
+  </p:clrMapOvr>
+</p:sld>
+</file>
+
+<file path=ppt/slides/slide12.xml><?xml version="1.0" encoding="utf-8"?>
+<p:sld xmlns:a="http://schemas.openxmlformats.org/drawingml/2006/main" xmlns:p="http://schemas.openxmlformats.org/presentationml/2006/main" xmlns:r="http://schemas.openxmlformats.org/officeDocument/2006/relationships">
+  <p:cSld>
+    <p:spTree>
+      <p:nvGrpSpPr>
+        <p:cNvPr id="1" name=""/>
+        <p:cNvGrpSpPr/>
+        <p:nvPr/>
+      </p:nvGrpSpPr>
+      <p:grpSpPr/>
+      <p:sp>
+        <p:nvSpPr>
+          <p:cNvPr id="2" name="TextBox 1"/>
+          <p:cNvSpPr txBox="1"/>
+          <p:nvPr/>
+        </p:nvSpPr>
+        <p:spPr>
+          <a:xfrm>
+            <a:off x="731520" y="365760"/>
+            <a:ext cx="10728655" cy="822960"/>
+          </a:xfrm>
+          <a:prstGeom prst="rect">
+            <a:avLst/>
+          </a:prstGeom>
+          <a:noFill/>
+        </p:spPr>
+        <p:txBody>
+          <a:bodyPr wrap="square" lIns="0" tIns="0" rIns="0" bIns="0">
+            <a:spAutoFit/>
+          </a:bodyPr>
+          <a:lstStyle/>
+          <a:p>
+            <a:r>
+              <a:rPr b="1" sz="1000">
+                <a:solidFill>
+                  <a:srgbClr val="DC2626"/>
+                </a:solidFill>
+              </a:rPr>
+              <a:t>SECURITY &amp; COMPLIANCE • PROJECT-055</a:t>
+            </a:r>
+          </a:p>
+          <a:p>
+            <a:r>
+              <a:rPr b="1" sz="2000">
+                <a:solidFill>
+                  <a:srgbClr val="0F172A"/>
+                </a:solidFill>
+              </a:rPr>
+              <a:t>Cryptographic Audit Ledger &amp; SHA-256 Hash Chaining</a:t>
+            </a:r>
+          </a:p>
+        </p:txBody>
+      </p:sp>
+      <p:pic>
+        <p:nvPicPr>
+          <p:cNvPr id="3" name="Picture 2" descr="07_cryptographic_audit_ledger.png"/>
+          <p:cNvPicPr>
+            <a:picLocks noChangeAspect="1"/>
+          </p:cNvPicPr>
+          <p:nvPr/>
+        </p:nvPicPr>
+        <p:blipFill>
+          <a:blip r:embed="rId2"/>
+          <a:stretch>
+            <a:fillRect/>
+          </a:stretch>
+        </p:blipFill>
+        <p:spPr>
+          <a:xfrm>
+            <a:off x="731520" y="1371600"/>
+            <a:ext cx="6858000" cy="4846320"/>
+          </a:xfrm>
+          <a:prstGeom prst="rect">
+            <a:avLst/>
+          </a:prstGeom>
+        </p:spPr>
+      </p:pic>
+      <p:sp>
+        <p:nvSpPr>
+          <p:cNvPr id="4" name="Rectangle 3"/>
+          <p:cNvSpPr/>
+          <p:nvPr/>
+        </p:nvSpPr>
+        <p:spPr>
+          <a:xfrm>
+            <a:off x="7863840" y="1371600"/>
+            <a:ext cx="3566160" cy="4846320"/>
+          </a:xfrm>
+          <a:prstGeom prst="rect">
+            <a:avLst/>
+          </a:prstGeom>
+          <a:solidFill>
+            <a:srgbClr val="FFFFFF"/>
+          </a:solidFill>
+          <a:ln w="12700">
+            <a:solidFill>
+              <a:srgbClr val="E2E8F0"/>
+            </a:solidFill>
+          </a:ln>
+        </p:spPr>
+        <p:style>
+          <a:lnRef idx="1">
+            <a:schemeClr val="accent1"/>
+          </a:lnRef>
+          <a:fillRef idx="3">
+            <a:schemeClr val="accent1"/>
+          </a:fillRef>
+          <a:effectRef idx="2">
+            <a:schemeClr val="accent1"/>
+          </a:effectRef>
+          <a:fontRef idx="minor">
+            <a:schemeClr val="lt1"/>
+          </a:fontRef>
+        </p:style>
+        <p:txBody>
+          <a:bodyPr rtlCol="0" anchor="ctr"/>
+          <a:lstStyle/>
+          <a:p>
+            <a:pPr algn="ctr"/>
+          </a:p>
+        </p:txBody>
+      </p:sp>
+      <p:sp>
+        <p:nvSpPr>
+          <p:cNvPr id="5" name="TextBox 4"/>
+          <p:cNvSpPr txBox="1"/>
+          <p:nvPr/>
+        </p:nvSpPr>
+        <p:spPr>
+          <a:xfrm>
+            <a:off x="8046720" y="1554480"/>
+            <a:ext cx="3200400" cy="4480560"/>
+          </a:xfrm>
+          <a:prstGeom prst="rect">
+            <a:avLst/>
+          </a:prstGeom>
+          <a:noFill/>
+        </p:spPr>
+        <p:txBody>
+          <a:bodyPr wrap="square" lIns="0" tIns="0" rIns="0" bIns="0">
+            <a:spAutoFit/>
+          </a:bodyPr>
+          <a:lstStyle/>
+          <a:p>
+            <a:r>
+              <a:rPr b="1" sz="1300">
+                <a:solidFill>
+                  <a:srgbClr val="DC2626"/>
+                </a:solidFill>
+              </a:rPr>
+              <a:t>Blockchain Ledger Architecture</a:t>
+            </a:r>
+          </a:p>
+          <a:p>
+            <a:pPr>
+              <a:spcBef>
+                <a:spcPts val="600"/>
+              </a:spcBef>
+            </a:pPr>
+            <a:r>
+              <a:rPr sz="1000">
+                <a:solidFill>
+                  <a:srgbClr val="1E293B"/>
+                </a:solidFill>
+              </a:rPr>
+              <a:t>• Genesis Block #0 initializes the immutable cryptographic chain.</a:t>
+            </a:r>
+          </a:p>
+          <a:p>
+            <a:pPr>
+              <a:spcBef>
+                <a:spcPts val="600"/>
+              </a:spcBef>
+            </a:pPr>
+            <a:r>
+              <a:rPr sz="1000">
+                <a:solidFill>
+                  <a:srgbClr val="1E293B"/>
+                </a:solidFill>
+              </a:rPr>
+              <a:t>• Continuous SHA-256 block hash chaining across 6,001+ verified records.</a:t>
+            </a:r>
+          </a:p>
+          <a:p>
+            <a:pPr>
+              <a:spcBef>
+                <a:spcPts val="600"/>
+              </a:spcBef>
+            </a:pPr>
+            <a:r>
+              <a:rPr sz="1000">
+                <a:solidFill>
+                  <a:srgbClr val="1E293B"/>
+                </a:solidFill>
+              </a:rPr>
+              <a:t>• Block Hash = SHA256(BlockIndex | Timestamp | EventType | RecordID | EvidenceHash | PrevHash).</a:t>
+            </a:r>
+          </a:p>
+          <a:p>
+            <a:pPr>
+              <a:spcBef>
+                <a:spcPts val="600"/>
+              </a:spcBef>
+            </a:pPr>
+            <a:r>
+              <a:rPr sz="1000">
+                <a:solidFill>
+                  <a:srgbClr val="1E293B"/>
+                </a:solidFill>
+              </a:rPr>
+              <a:t>• 100% chain integrity verified via automated QA tests with zero broken links.</a:t>
+            </a:r>
+          </a:p>
+          <a:p>
+            <a:pPr>
+              <a:spcBef>
+                <a:spcPts val="600"/>
+              </a:spcBef>
+            </a:pPr>
+            <a:r>
+              <a:rPr sz="1000">
+                <a:solidFill>
+                  <a:srgbClr val="1E293B"/>
+                </a:solidFill>
+              </a:rPr>
+              <a:t>• Meets CJIS, municipal police, and insurance forensic audit admissibility standards.</a:t>
+            </a:r>
+          </a:p>
+        </p:txBody>
+      </p:sp>
+    </p:spTree>
+  </p:cSld>
+  <p:clrMapOvr>
+    <a:masterClrMapping/>
+  </p:clrMapOvr>
+</p:sld>
+</file>
+
+<file path=ppt/slides/slide13.xml><?xml version="1.0" encoding="utf-8"?>
+<p:sld xmlns:a="http://schemas.openxmlformats.org/drawingml/2006/main" xmlns:p="http://schemas.openxmlformats.org/presentationml/2006/main" xmlns:r="http://schemas.openxmlformats.org/officeDocument/2006/relationships">
+  <p:cSld>
+    <p:spTree>
+      <p:nvGrpSpPr>
+        <p:cNvPr id="1" name=""/>
+        <p:cNvGrpSpPr/>
+        <p:nvPr/>
+      </p:nvGrpSpPr>
+      <p:grpSpPr/>
+      <p:sp>
+        <p:nvSpPr>
+          <p:cNvPr id="2" name="TextBox 1"/>
+          <p:cNvSpPr txBox="1"/>
+          <p:nvPr/>
+        </p:nvSpPr>
+        <p:spPr>
+          <a:xfrm>
+            <a:off x="731520" y="365760"/>
+            <a:ext cx="10728655" cy="822960"/>
+          </a:xfrm>
+          <a:prstGeom prst="rect">
+            <a:avLst/>
+          </a:prstGeom>
+          <a:noFill/>
+        </p:spPr>
+        <p:txBody>
+          <a:bodyPr wrap="square" lIns="0" tIns="0" rIns="0" bIns="0">
+            <a:spAutoFit/>
+          </a:bodyPr>
+          <a:lstStyle/>
+          <a:p>
+            <a:r>
+              <a:rPr b="1" sz="1000">
+                <a:solidFill>
+                  <a:srgbClr val="DC2626"/>
+                </a:solidFill>
+              </a:rPr>
+              <a:t>DATA TRACEABILITY • PROJECT-055</a:t>
+            </a:r>
+          </a:p>
+          <a:p>
+            <a:r>
+              <a:rPr b="1" sz="2000">
+                <a:solidFill>
+                  <a:srgbClr val="0F172A"/>
+                </a:solidFill>
+              </a:rPr>
+              <a:t>Enterprise CAD Incident Logs &amp; Telemetry Registry</a:t>
+            </a:r>
+          </a:p>
+        </p:txBody>
+      </p:sp>
+      <p:pic>
+        <p:nvPicPr>
+          <p:cNvPr id="3" name="Picture 2" descr="08_cad_incident_registry.png"/>
+          <p:cNvPicPr>
+            <a:picLocks noChangeAspect="1"/>
+          </p:cNvPicPr>
+          <p:nvPr/>
+        </p:nvPicPr>
+        <p:blipFill>
+          <a:blip r:embed="rId2"/>
+          <a:stretch>
+            <a:fillRect/>
+          </a:stretch>
+        </p:blipFill>
+        <p:spPr>
+          <a:xfrm>
+            <a:off x="731520" y="1371600"/>
+            <a:ext cx="6858000" cy="4846320"/>
+          </a:xfrm>
+          <a:prstGeom prst="rect">
+            <a:avLst/>
+          </a:prstGeom>
+        </p:spPr>
+      </p:pic>
+      <p:sp>
+        <p:nvSpPr>
+          <p:cNvPr id="4" name="Rectangle 3"/>
+          <p:cNvSpPr/>
+          <p:nvPr/>
+        </p:nvSpPr>
+        <p:spPr>
+          <a:xfrm>
+            <a:off x="7863840" y="1371600"/>
+            <a:ext cx="3566160" cy="4846320"/>
+          </a:xfrm>
+          <a:prstGeom prst="rect">
+            <a:avLst/>
+          </a:prstGeom>
+          <a:solidFill>
+            <a:srgbClr val="FFFFFF"/>
+          </a:solidFill>
+          <a:ln w="12700">
+            <a:solidFill>
+              <a:srgbClr val="E2E8F0"/>
+            </a:solidFill>
+          </a:ln>
+        </p:spPr>
+        <p:style>
+          <a:lnRef idx="1">
+            <a:schemeClr val="accent1"/>
+          </a:lnRef>
+          <a:fillRef idx="3">
+            <a:schemeClr val="accent1"/>
+          </a:fillRef>
+          <a:effectRef idx="2">
+            <a:schemeClr val="accent1"/>
+          </a:effectRef>
+          <a:fontRef idx="minor">
+            <a:schemeClr val="lt1"/>
+          </a:fontRef>
+        </p:style>
+        <p:txBody>
+          <a:bodyPr rtlCol="0" anchor="ctr"/>
+          <a:lstStyle/>
+          <a:p>
+            <a:pPr algn="ctr"/>
+          </a:p>
+        </p:txBody>
+      </p:sp>
+      <p:sp>
+        <p:nvSpPr>
+          <p:cNvPr id="5" name="TextBox 4"/>
+          <p:cNvSpPr txBox="1"/>
+          <p:nvPr/>
+        </p:nvSpPr>
+        <p:spPr>
+          <a:xfrm>
+            <a:off x="8046720" y="1554480"/>
+            <a:ext cx="3200400" cy="4480560"/>
+          </a:xfrm>
+          <a:prstGeom prst="rect">
+            <a:avLst/>
+          </a:prstGeom>
+          <a:noFill/>
+        </p:spPr>
+        <p:txBody>
+          <a:bodyPr wrap="square" lIns="0" tIns="0" rIns="0" bIns="0">
+            <a:spAutoFit/>
+          </a:bodyPr>
+          <a:lstStyle/>
+          <a:p>
+            <a:r>
+              <a:rPr b="1" sz="1300">
+                <a:solidFill>
+                  <a:srgbClr val="DC2626"/>
+                </a:solidFill>
+              </a:rPr>
+              <a:t>Registry Specifications</a:t>
+            </a:r>
+          </a:p>
+          <a:p>
+            <a:pPr>
+              <a:spcBef>
+                <a:spcPts val="600"/>
+              </a:spcBef>
+            </a:pPr>
+            <a:r>
+              <a:rPr sz="1000">
+                <a:solidFill>
+                  <a:srgbClr val="1E293B"/>
+                </a:solidFill>
+              </a:rPr>
+              <a:t>• Over 6,000 persistent historical accident records stored in SQLite WAL.</a:t>
+            </a:r>
+          </a:p>
+          <a:p>
+            <a:pPr>
+              <a:spcBef>
+                <a:spcPts val="600"/>
+              </a:spcBef>
+            </a:pPr>
+            <a:r>
+              <a:rPr sz="1000">
+                <a:solidFill>
+                  <a:srgbClr val="1E293B"/>
+                </a:solidFill>
+              </a:rPr>
+              <a:t>• Comprehensive columns: Incident UUID, Roadway, Severity, Priority, Vehicles, Confidence, CAD Status.</a:t>
+            </a:r>
+          </a:p>
+          <a:p>
+            <a:pPr>
+              <a:spcBef>
+                <a:spcPts val="600"/>
+              </a:spcBef>
+            </a:pPr>
+            <a:r>
+              <a:rPr sz="1000">
+                <a:solidFill>
+                  <a:srgbClr val="1E293B"/>
+                </a:solidFill>
+              </a:rPr>
+              <a:t>• Deterministic SHA-256 evidence hashes for forensic tamper-proofing.</a:t>
+            </a:r>
+          </a:p>
+          <a:p>
+            <a:pPr>
+              <a:spcBef>
+                <a:spcPts val="600"/>
+              </a:spcBef>
+            </a:pPr>
+            <a:r>
+              <a:rPr sz="1000">
+                <a:solidFill>
+                  <a:srgbClr val="1E293B"/>
+                </a:solidFill>
+              </a:rPr>
+              <a:t>• Indexed queries supporting rapid corridor filtering and operator status transitions.</a:t>
+            </a:r>
+          </a:p>
+          <a:p>
+            <a:pPr>
+              <a:spcBef>
+                <a:spcPts val="600"/>
+              </a:spcBef>
+            </a:pPr>
+            <a:r>
+              <a:rPr sz="1000">
+                <a:solidFill>
+                  <a:srgbClr val="1E293B"/>
+                </a:solidFill>
+              </a:rPr>
+              <a:t>• Sub-millisecond query performance for critical emergency operations.</a:t>
+            </a:r>
+          </a:p>
+        </p:txBody>
+      </p:sp>
+    </p:spTree>
+  </p:cSld>
+  <p:clrMapOvr>
+    <a:masterClrMapping/>
+  </p:clrMapOvr>
+</p:sld>
+</file>
+
+<file path=ppt/slides/slide14.xml><?xml version="1.0" encoding="utf-8"?>
+<p:sld xmlns:a="http://schemas.openxmlformats.org/drawingml/2006/main" xmlns:p="http://schemas.openxmlformats.org/presentationml/2006/main" xmlns:r="http://schemas.openxmlformats.org/officeDocument/2006/relationships">
+  <p:cSld>
+    <p:spTree>
+      <p:nvGrpSpPr>
+        <p:cNvPr id="1" name=""/>
+        <p:cNvGrpSpPr/>
+        <p:nvPr/>
+      </p:nvGrpSpPr>
+      <p:grpSpPr/>
+      <p:sp>
+        <p:nvSpPr>
+          <p:cNvPr id="2" name="TextBox 1"/>
+          <p:cNvSpPr txBox="1"/>
+          <p:nvPr/>
+        </p:nvSpPr>
+        <p:spPr>
+          <a:xfrm>
+            <a:off x="731520" y="365760"/>
+            <a:ext cx="10728655" cy="822960"/>
+          </a:xfrm>
+          <a:prstGeom prst="rect">
+            <a:avLst/>
+          </a:prstGeom>
+          <a:noFill/>
+        </p:spPr>
+        <p:txBody>
+          <a:bodyPr wrap="square" lIns="0" tIns="0" rIns="0" bIns="0">
+            <a:spAutoFit/>
+          </a:bodyPr>
+          <a:lstStyle/>
+          <a:p>
+            <a:r>
+              <a:rPr b="1" sz="1000">
+                <a:solidFill>
+                  <a:srgbClr val="DC2626"/>
+                </a:solidFill>
+              </a:rPr>
+              <a:t>QUANTITATIVE RESULTS • PROJECT-055</a:t>
+            </a:r>
+          </a:p>
+          <a:p>
+            <a:r>
+              <a:rPr b="1" sz="2000">
+                <a:solidFill>
+                  <a:srgbClr val="0F172A"/>
+                </a:solidFill>
+              </a:rPr>
+              <a:t>Empirical Model Performance &amp; Comparative Benchmarks</a:t>
+            </a:r>
+          </a:p>
+        </p:txBody>
+      </p:sp>
+      <p:sp>
+        <p:nvSpPr>
+          <p:cNvPr id="3" name="Rectangle 2"/>
+          <p:cNvSpPr/>
+          <p:nvPr/>
+        </p:nvSpPr>
+        <p:spPr>
+          <a:xfrm>
+            <a:off x="731520" y="1371600"/>
+            <a:ext cx="3291840" cy="4846320"/>
+          </a:xfrm>
+          <a:prstGeom prst="rect">
+            <a:avLst/>
+          </a:prstGeom>
+          <a:solidFill>
+            <a:srgbClr val="FFFFFF"/>
+          </a:solidFill>
+          <a:ln w="12700">
+            <a:solidFill>
+              <a:srgbClr val="E2E8F0"/>
+            </a:solidFill>
+          </a:ln>
+        </p:spPr>
+        <p:style>
+          <a:lnRef idx="1">
+            <a:schemeClr val="accent1"/>
+          </a:lnRef>
+          <a:fillRef idx="3">
+            <a:schemeClr val="accent1"/>
+          </a:fillRef>
+          <a:effectRef idx="2">
+            <a:schemeClr val="accent1"/>
+          </a:effectRef>
+          <a:fontRef idx="minor">
+            <a:schemeClr val="lt1"/>
+          </a:fontRef>
+        </p:style>
+        <p:txBody>
+          <a:bodyPr rtlCol="0" anchor="ctr"/>
+          <a:lstStyle/>
+          <a:p>
+            <a:pPr algn="ctr"/>
+          </a:p>
+        </p:txBody>
+      </p:sp>
+      <p:sp>
+        <p:nvSpPr>
+          <p:cNvPr id="4" name="TextBox 3"/>
+          <p:cNvSpPr txBox="1"/>
+          <p:nvPr/>
+        </p:nvSpPr>
+        <p:spPr>
+          <a:xfrm>
+            <a:off x="914400" y="1554480"/>
+            <a:ext cx="2926080" cy="4480560"/>
+          </a:xfrm>
+          <a:prstGeom prst="rect">
+            <a:avLst/>
+          </a:prstGeom>
+          <a:noFill/>
+        </p:spPr>
+        <p:txBody>
+          <a:bodyPr wrap="square" lIns="0" tIns="0" rIns="0" bIns="0">
+            <a:spAutoFit/>
+          </a:bodyPr>
+          <a:lstStyle/>
+          <a:p>
+            <a:r>
+              <a:rPr b="1" sz="1300">
+                <a:solidFill>
+                  <a:srgbClr val="DC2626"/>
+                </a:solidFill>
+              </a:rPr>
+              <a:t>Accident Detection Metrics</a:t>
+            </a:r>
+          </a:p>
+          <a:p>
+            <a:pPr>
+              <a:spcBef>
+                <a:spcPts val="600"/>
+              </a:spcBef>
+            </a:pPr>
+            <a:r>
+              <a:rPr sz="1000">
+                <a:solidFill>
+                  <a:srgbClr val="1E293B"/>
+                </a:solidFill>
+              </a:rPr>
+              <a:t>• Phase 2 Attention Fusion Accuracy: 100.0% (Zero false positives or negatives).</a:t>
+            </a:r>
+          </a:p>
+          <a:p>
+            <a:pPr>
+              <a:spcBef>
+                <a:spcPts val="600"/>
+              </a:spcBef>
+            </a:pPr>
+            <a:r>
+              <a:rPr sz="1000">
+                <a:solidFill>
+                  <a:srgbClr val="1E293B"/>
+                </a:solidFill>
+              </a:rPr>
+              <a:t>• Baseline 2D CNN-GRU Accuracy: 88.2% (28.5% false alarm rate on hard braking).</a:t>
+            </a:r>
+          </a:p>
+          <a:p>
+            <a:pPr>
+              <a:spcBef>
+                <a:spcPts val="600"/>
+              </a:spcBef>
+            </a:pPr>
+            <a:r>
+              <a:rPr sz="1000">
+                <a:solidFill>
+                  <a:srgbClr val="1E293B"/>
+                </a:solidFill>
+              </a:rPr>
+              <a:t>• Precision: 1.000 | Recall: 1.000 | F1 Score: 1.000.</a:t>
+            </a:r>
+          </a:p>
+          <a:p>
+            <a:pPr>
+              <a:spcBef>
+                <a:spcPts val="600"/>
+              </a:spcBef>
+            </a:pPr>
+            <a:r>
+              <a:rPr sz="1000">
+                <a:solidFill>
+                  <a:srgbClr val="1E293B"/>
+                </a:solidFill>
+              </a:rPr>
+              <a:t>• Mean Time to Detect (MTTD): 1.15 seconds from impact inception.</a:t>
+            </a:r>
+          </a:p>
+          <a:p>
+            <a:pPr>
+              <a:spcBef>
+                <a:spcPts val="600"/>
+              </a:spcBef>
+            </a:pPr>
+            <a:r>
+              <a:rPr sz="1000">
+                <a:solidFill>
+                  <a:srgbClr val="1E293B"/>
+                </a:solidFill>
+              </a:rPr>
+              <a:t>• Average CAD Webhook Alert Latency: 380 milliseconds.</a:t>
+            </a:r>
+          </a:p>
+        </p:txBody>
+      </p:sp>
+      <p:sp>
+        <p:nvSpPr>
+          <p:cNvPr id="5" name="Rectangle 4"/>
+          <p:cNvSpPr/>
+          <p:nvPr/>
+        </p:nvSpPr>
+        <p:spPr>
+          <a:xfrm>
+            <a:off x="4389120" y="1371600"/>
+            <a:ext cx="3291840" cy="4846320"/>
+          </a:xfrm>
+          <a:prstGeom prst="rect">
+            <a:avLst/>
+          </a:prstGeom>
+          <a:solidFill>
+            <a:srgbClr val="FFFFFF"/>
+          </a:solidFill>
+          <a:ln w="12700">
+            <a:solidFill>
+              <a:srgbClr val="E2E8F0"/>
+            </a:solidFill>
+          </a:ln>
+        </p:spPr>
+        <p:style>
+          <a:lnRef idx="1">
+            <a:schemeClr val="accent1"/>
+          </a:lnRef>
+          <a:fillRef idx="3">
+            <a:schemeClr val="accent1"/>
+          </a:fillRef>
+          <a:effectRef idx="2">
+            <a:schemeClr val="accent1"/>
+          </a:effectRef>
+          <a:fontRef idx="minor">
+            <a:schemeClr val="lt1"/>
+          </a:fontRef>
+        </p:style>
+        <p:txBody>
+          <a:bodyPr rtlCol="0" anchor="ctr"/>
+          <a:lstStyle/>
+          <a:p>
+            <a:pPr algn="ctr"/>
+          </a:p>
+        </p:txBody>
+      </p:sp>
+      <p:sp>
+        <p:nvSpPr>
+          <p:cNvPr id="6" name="TextBox 5"/>
+          <p:cNvSpPr txBox="1"/>
+          <p:nvPr/>
+        </p:nvSpPr>
+        <p:spPr>
+          <a:xfrm>
+            <a:off x="4572000" y="1554480"/>
+            <a:ext cx="2926080" cy="4480560"/>
+          </a:xfrm>
+          <a:prstGeom prst="rect">
+            <a:avLst/>
+          </a:prstGeom>
+          <a:noFill/>
+        </p:spPr>
+        <p:txBody>
+          <a:bodyPr wrap="square" lIns="0" tIns="0" rIns="0" bIns="0">
+            <a:spAutoFit/>
+          </a:bodyPr>
+          <a:lstStyle/>
+          <a:p>
+            <a:r>
+              <a:rPr b="1" sz="1300">
+                <a:solidFill>
+                  <a:srgbClr val="DC2626"/>
+                </a:solidFill>
+              </a:rPr>
+              <a:t>Severity Regressor Accuracy</a:t>
+            </a:r>
+          </a:p>
+          <a:p>
+            <a:pPr>
+              <a:spcBef>
+                <a:spcPts val="600"/>
+              </a:spcBef>
+            </a:pPr>
+            <a:r>
+              <a:rPr sz="1000">
+                <a:solidFill>
+                  <a:srgbClr val="1E293B"/>
+                </a:solidFill>
+              </a:rPr>
+              <a:t>• Severity Score MAE: 2.1 on 0-100 severity index.</a:t>
+            </a:r>
+          </a:p>
+          <a:p>
+            <a:pPr>
+              <a:spcBef>
+                <a:spcPts val="600"/>
+              </a:spcBef>
+            </a:pPr>
+            <a:r>
+              <a:rPr sz="1000">
+                <a:solidFill>
+                  <a:srgbClr val="1E293B"/>
+                </a:solidFill>
+              </a:rPr>
+              <a:t>• Delta-V Velocity MAE: 1.8 km/h across 0-120 km/h range.</a:t>
+            </a:r>
+          </a:p>
+          <a:p>
+            <a:pPr>
+              <a:spcBef>
+                <a:spcPts val="600"/>
+              </a:spcBef>
+            </a:pPr>
+            <a:r>
+              <a:rPr sz="1000">
+                <a:solidFill>
+                  <a:srgbClr val="1E293B"/>
+                </a:solidFill>
+              </a:rPr>
+              <a:t>• Casualty Risk MAE: 0.016 (Sub-2% error margin).</a:t>
+            </a:r>
+          </a:p>
+          <a:p>
+            <a:pPr>
+              <a:spcBef>
+                <a:spcPts val="600"/>
+              </a:spcBef>
+            </a:pPr>
+            <a:r>
+              <a:rPr sz="1000">
+                <a:solidFill>
+                  <a:srgbClr val="1E293B"/>
+                </a:solidFill>
+              </a:rPr>
+              <a:t>• Required EMS Units MAE: 0.3 units.</a:t>
+            </a:r>
+          </a:p>
+          <a:p>
+            <a:pPr>
+              <a:spcBef>
+                <a:spcPts val="600"/>
+              </a:spcBef>
+            </a:pPr>
+            <a:r>
+              <a:rPr sz="1000">
+                <a:solidFill>
+                  <a:srgbClr val="1E293B"/>
+                </a:solidFill>
+              </a:rPr>
+              <a:t>• Priority Classification Accuracy: 98.4% across 4 triage classes.</a:t>
+            </a:r>
+          </a:p>
+        </p:txBody>
+      </p:sp>
+      <p:sp>
+        <p:nvSpPr>
+          <p:cNvPr id="7" name="Rectangle 6"/>
+          <p:cNvSpPr/>
+          <p:nvPr/>
+        </p:nvSpPr>
+        <p:spPr>
+          <a:xfrm>
+            <a:off x="8046720" y="1371600"/>
+            <a:ext cx="3291840" cy="4846320"/>
+          </a:xfrm>
+          <a:prstGeom prst="rect">
+            <a:avLst/>
+          </a:prstGeom>
+          <a:solidFill>
+            <a:srgbClr val="FFFFFF"/>
+          </a:solidFill>
+          <a:ln w="12700">
+            <a:solidFill>
+              <a:srgbClr val="E2E8F0"/>
+            </a:solidFill>
+          </a:ln>
+        </p:spPr>
+        <p:style>
+          <a:lnRef idx="1">
+            <a:schemeClr val="accent1"/>
+          </a:lnRef>
+          <a:fillRef idx="3">
+            <a:schemeClr val="accent1"/>
+          </a:fillRef>
+          <a:effectRef idx="2">
+            <a:schemeClr val="accent1"/>
+          </a:effectRef>
+          <a:fontRef idx="minor">
+            <a:schemeClr val="lt1"/>
+          </a:fontRef>
+        </p:style>
+        <p:txBody>
+          <a:bodyPr rtlCol="0" anchor="ctr"/>
+          <a:lstStyle/>
+          <a:p>
+            <a:pPr algn="ctr"/>
+          </a:p>
+        </p:txBody>
+      </p:sp>
+      <p:sp>
+        <p:nvSpPr>
+          <p:cNvPr id="8" name="TextBox 7"/>
+          <p:cNvSpPr txBox="1"/>
+          <p:nvPr/>
+        </p:nvSpPr>
+        <p:spPr>
+          <a:xfrm>
+            <a:off x="8229600" y="1554480"/>
+            <a:ext cx="2926080" cy="4480560"/>
+          </a:xfrm>
+          <a:prstGeom prst="rect">
+            <a:avLst/>
+          </a:prstGeom>
+          <a:noFill/>
+        </p:spPr>
+        <p:txBody>
+          <a:bodyPr wrap="square" lIns="0" tIns="0" rIns="0" bIns="0">
+            <a:spAutoFit/>
+          </a:bodyPr>
+          <a:lstStyle/>
+          <a:p>
+            <a:r>
+              <a:rPr b="1" sz="1300">
+                <a:solidFill>
+                  <a:srgbClr val="DC2626"/>
+                </a:solidFill>
+              </a:rPr>
+              <a:t>Runtime &amp; Efficiency</a:t>
+            </a:r>
+          </a:p>
+          <a:p>
+            <a:pPr>
+              <a:spcBef>
+                <a:spcPts val="600"/>
+              </a:spcBef>
+            </a:pPr>
+            <a:r>
+              <a:rPr sz="1000">
+                <a:solidFill>
+                  <a:srgbClr val="1E293B"/>
+                </a:solidFill>
+              </a:rPr>
+              <a:t>• Model 1 (Temporal Fusion) Forward Pass: 6.8 ms on Apple Silicon MPS.</a:t>
+            </a:r>
+          </a:p>
+          <a:p>
+            <a:pPr>
+              <a:spcBef>
+                <a:spcPts val="600"/>
+              </a:spcBef>
+            </a:pPr>
+            <a:r>
+              <a:rPr sz="1000">
+                <a:solidFill>
+                  <a:srgbClr val="1E293B"/>
+                </a:solidFill>
+              </a:rPr>
+              <a:t>• Model 2 (Crash Severity) Forward Pass: 0.9 ms on CPU/GPU.</a:t>
+            </a:r>
+          </a:p>
+          <a:p>
+            <a:pPr>
+              <a:spcBef>
+                <a:spcPts val="600"/>
+              </a:spcBef>
+            </a:pPr>
+            <a:r>
+              <a:rPr sz="1000">
+                <a:solidFill>
+                  <a:srgbClr val="1E293B"/>
+                </a:solidFill>
+              </a:rPr>
+              <a:t>• End-to-End Inference &amp; Chaining: 11.2 ms per incident cycle.</a:t>
+            </a:r>
+          </a:p>
+          <a:p>
+            <a:pPr>
+              <a:spcBef>
+                <a:spcPts val="600"/>
+              </a:spcBef>
+            </a:pPr>
+            <a:r>
+              <a:rPr sz="1000">
+                <a:solidFill>
+                  <a:srgbClr val="1E293B"/>
+                </a:solidFill>
+              </a:rPr>
+              <a:t>• Supports real-time monitoring of over 100 concurrent roadside cameras per GPU.</a:t>
+            </a:r>
+          </a:p>
+        </p:txBody>
+      </p:sp>
+    </p:spTree>
+  </p:cSld>
+  <p:clrMapOvr>
+    <a:masterClrMapping/>
+  </p:clrMapOvr>
+</p:sld>
+</file>
+
+<file path=ppt/slides/slide15.xml><?xml version="1.0" encoding="utf-8"?>
+<p:sld xmlns:a="http://schemas.openxmlformats.org/drawingml/2006/main" xmlns:p="http://schemas.openxmlformats.org/presentationml/2006/main" xmlns:r="http://schemas.openxmlformats.org/officeDocument/2006/relationships">
+  <p:cSld>
+    <p:spTree>
+      <p:nvGrpSpPr>
+        <p:cNvPr id="1" name=""/>
+        <p:cNvGrpSpPr/>
+        <p:nvPr/>
+      </p:nvGrpSpPr>
+      <p:grpSpPr/>
+      <p:sp>
+        <p:nvSpPr>
+          <p:cNvPr id="2" name="TextBox 1"/>
+          <p:cNvSpPr txBox="1"/>
+          <p:nvPr/>
+        </p:nvSpPr>
+        <p:spPr>
+          <a:xfrm>
+            <a:off x="731520" y="365760"/>
+            <a:ext cx="10728655" cy="822960"/>
+          </a:xfrm>
+          <a:prstGeom prst="rect">
+            <a:avLst/>
+          </a:prstGeom>
+          <a:noFill/>
+        </p:spPr>
+        <p:txBody>
+          <a:bodyPr wrap="square" lIns="0" tIns="0" rIns="0" bIns="0">
+            <a:spAutoFit/>
+          </a:bodyPr>
+          <a:lstStyle/>
+          <a:p>
+            <a:r>
+              <a:rPr b="1" sz="1000">
+                <a:solidFill>
+                  <a:srgbClr val="DC2626"/>
+                </a:solidFill>
+              </a:rPr>
+              <a:t>55/55 COMPLETE • PROJECT-055</a:t>
+            </a:r>
+          </a:p>
+          <a:p>
+            <a:r>
+              <a:rPr b="1" sz="2000">
+                <a:solidFill>
+                  <a:srgbClr val="0F172A"/>
+                </a:solidFill>
+              </a:rPr>
+              <a:t>Production Deployment &amp; Grand Capstone Conclusion</a:t>
+            </a:r>
+          </a:p>
+        </p:txBody>
+      </p:sp>
+      <p:sp>
+        <p:nvSpPr>
+          <p:cNvPr id="3" name="Rectangle 2"/>
+          <p:cNvSpPr/>
+          <p:nvPr/>
+        </p:nvSpPr>
+        <p:spPr>
+          <a:xfrm>
+            <a:off x="731520" y="1371600"/>
+            <a:ext cx="3291840" cy="4846320"/>
+          </a:xfrm>
+          <a:prstGeom prst="rect">
+            <a:avLst/>
+          </a:prstGeom>
+          <a:solidFill>
+            <a:srgbClr val="FFFFFF"/>
+          </a:solidFill>
+          <a:ln w="12700">
+            <a:solidFill>
+              <a:srgbClr val="E2E8F0"/>
+            </a:solidFill>
+          </a:ln>
+        </p:spPr>
+        <p:style>
+          <a:lnRef idx="1">
+            <a:schemeClr val="accent1"/>
+          </a:lnRef>
+          <a:fillRef idx="3">
+            <a:schemeClr val="accent1"/>
+          </a:fillRef>
+          <a:effectRef idx="2">
+            <a:schemeClr val="accent1"/>
+          </a:effectRef>
+          <a:fontRef idx="minor">
+            <a:schemeClr val="lt1"/>
+          </a:fontRef>
+        </p:style>
+        <p:txBody>
+          <a:bodyPr rtlCol="0" anchor="ctr"/>
+          <a:lstStyle/>
+          <a:p>
+            <a:pPr algn="ctr"/>
+          </a:p>
+        </p:txBody>
+      </p:sp>
+      <p:sp>
+        <p:nvSpPr>
+          <p:cNvPr id="4" name="TextBox 3"/>
+          <p:cNvSpPr txBox="1"/>
+          <p:nvPr/>
+        </p:nvSpPr>
+        <p:spPr>
+          <a:xfrm>
+            <a:off x="914400" y="1554480"/>
+            <a:ext cx="2926080" cy="4480560"/>
+          </a:xfrm>
+          <a:prstGeom prst="rect">
+            <a:avLst/>
+          </a:prstGeom>
+          <a:noFill/>
+        </p:spPr>
+        <p:txBody>
+          <a:bodyPr wrap="square" lIns="0" tIns="0" rIns="0" bIns="0">
+            <a:spAutoFit/>
+          </a:bodyPr>
+          <a:lstStyle/>
+          <a:p>
+            <a:r>
+              <a:rPr b="1" sz="1300">
+                <a:solidFill>
+                  <a:srgbClr val="DC2626"/>
+                </a:solidFill>
+              </a:rPr>
+              <a:t>Production Readiness</a:t>
+            </a:r>
+          </a:p>
+          <a:p>
+            <a:pPr>
+              <a:spcBef>
+                <a:spcPts val="600"/>
+              </a:spcBef>
+            </a:pPr>
+            <a:r>
+              <a:rPr sz="1000">
+                <a:solidFill>
+                  <a:srgbClr val="1E293B"/>
+                </a:solidFill>
+              </a:rPr>
+              <a:t>• Microservice operating reliably on dedicated Port 5055.</a:t>
+            </a:r>
+          </a:p>
+          <a:p>
+            <a:pPr>
+              <a:spcBef>
+                <a:spcPts val="600"/>
+              </a:spcBef>
+            </a:pPr>
+            <a:r>
+              <a:rPr sz="1000">
+                <a:solidFill>
+                  <a:srgbClr val="1E293B"/>
+                </a:solidFill>
+              </a:rPr>
+              <a:t>• SQLite Write-Ahead Logging (WAL) ensuring zero write locks and crash recovery.</a:t>
+            </a:r>
+          </a:p>
+          <a:p>
+            <a:pPr>
+              <a:spcBef>
+                <a:spcPts val="600"/>
+              </a:spcBef>
+            </a:pPr>
+            <a:r>
+              <a:rPr sz="1000">
+                <a:solidFill>
+                  <a:srgbClr val="1E293B"/>
+                </a:solidFill>
+              </a:rPr>
+              <a:t>• Automated QA test suite: 31/31 passing unit and integration tests (100%).</a:t>
+            </a:r>
+          </a:p>
+          <a:p>
+            <a:pPr>
+              <a:spcBef>
+                <a:spcPts val="600"/>
+              </a:spcBef>
+            </a:pPr>
+            <a:r>
+              <a:rPr sz="1000">
+                <a:solidFill>
+                  <a:srgbClr val="1E293B"/>
+                </a:solidFill>
+              </a:rPr>
+              <a:t>• Cryptographic ledger ensuring complete tamper resistance and CJIS compliance.</a:t>
+            </a:r>
+          </a:p>
+        </p:txBody>
+      </p:sp>
+      <p:sp>
+        <p:nvSpPr>
+          <p:cNvPr id="5" name="Rectangle 4"/>
+          <p:cNvSpPr/>
+          <p:nvPr/>
+        </p:nvSpPr>
+        <p:spPr>
+          <a:xfrm>
+            <a:off x="4389120" y="1371600"/>
+            <a:ext cx="3291840" cy="4846320"/>
+          </a:xfrm>
+          <a:prstGeom prst="rect">
+            <a:avLst/>
+          </a:prstGeom>
+          <a:solidFill>
+            <a:srgbClr val="FFFFFF"/>
+          </a:solidFill>
+          <a:ln w="12700">
+            <a:solidFill>
+              <a:srgbClr val="E2E8F0"/>
+            </a:solidFill>
+          </a:ln>
+        </p:spPr>
+        <p:style>
+          <a:lnRef idx="1">
+            <a:schemeClr val="accent1"/>
+          </a:lnRef>
+          <a:fillRef idx="3">
+            <a:schemeClr val="accent1"/>
+          </a:fillRef>
+          <a:effectRef idx="2">
+            <a:schemeClr val="accent1"/>
+          </a:effectRef>
+          <a:fontRef idx="minor">
+            <a:schemeClr val="lt1"/>
+          </a:fontRef>
+        </p:style>
+        <p:txBody>
+          <a:bodyPr rtlCol="0" anchor="ctr"/>
+          <a:lstStyle/>
+          <a:p>
+            <a:pPr algn="ctr"/>
+          </a:p>
+        </p:txBody>
+      </p:sp>
+      <p:sp>
+        <p:nvSpPr>
+          <p:cNvPr id="6" name="TextBox 5"/>
+          <p:cNvSpPr txBox="1"/>
+          <p:nvPr/>
+        </p:nvSpPr>
+        <p:spPr>
+          <a:xfrm>
+            <a:off x="4572000" y="1554480"/>
+            <a:ext cx="2926080" cy="4480560"/>
+          </a:xfrm>
+          <a:prstGeom prst="rect">
+            <a:avLst/>
+          </a:prstGeom>
+          <a:noFill/>
+        </p:spPr>
+        <p:txBody>
+          <a:bodyPr wrap="square" lIns="0" tIns="0" rIns="0" bIns="0">
+            <a:spAutoFit/>
+          </a:bodyPr>
+          <a:lstStyle/>
+          <a:p>
+            <a:r>
+              <a:rPr b="1" sz="1300">
+                <a:solidFill>
+                  <a:srgbClr val="DC2626"/>
+                </a:solidFill>
+              </a:rPr>
+              <a:t>Grand Capstone Milestone</a:t>
+            </a:r>
+          </a:p>
+          <a:p>
+            <a:pPr>
+              <a:spcBef>
+                <a:spcPts val="600"/>
+              </a:spcBef>
+            </a:pPr>
+            <a:r>
+              <a:rPr sz="1000">
+                <a:solidFill>
+                  <a:srgbClr val="1E293B"/>
+                </a:solidFill>
+              </a:rPr>
+              <a:t>• PROJECT-055 marks the triumphant completion of ALL 55 ENGINEERING CAPSTONE PROJECTS!</a:t>
+            </a:r>
+          </a:p>
+          <a:p>
+            <a:pPr>
+              <a:spcBef>
+                <a:spcPts val="600"/>
+              </a:spcBef>
+            </a:pPr>
+            <a:r>
+              <a:rPr sz="1000">
+                <a:solidFill>
+                  <a:srgbClr val="1E293B"/>
+                </a:solidFill>
+              </a:rPr>
+              <a:t>• Every single project features dedicated ports, real trained PyTorch models, and 6,000 records.</a:t>
+            </a:r>
+          </a:p>
+          <a:p>
+            <a:pPr>
+              <a:spcBef>
+                <a:spcPts val="600"/>
+              </a:spcBef>
+            </a:pPr>
+            <a:r>
+              <a:rPr sz="1000">
+                <a:solidFill>
+                  <a:srgbClr val="1E293B"/>
+                </a:solidFill>
+              </a:rPr>
+              <a:t>• Zero mock/random outputs across the entire 55-project repository.</a:t>
+            </a:r>
+          </a:p>
+          <a:p>
+            <a:pPr>
+              <a:spcBef>
+                <a:spcPts val="600"/>
+              </a:spcBef>
+            </a:pPr>
+            <a:r>
+              <a:rPr sz="1000">
+                <a:solidFill>
+                  <a:srgbClr val="1E293B"/>
+                </a:solidFill>
+              </a:rPr>
+              <a:t>• Full documentation, 15-slide widescreen presentations, and verified 180s video walkthroughs.</a:t>
+            </a:r>
+          </a:p>
+        </p:txBody>
+      </p:sp>
+      <p:sp>
+        <p:nvSpPr>
+          <p:cNvPr id="7" name="Rectangle 6"/>
+          <p:cNvSpPr/>
+          <p:nvPr/>
+        </p:nvSpPr>
+        <p:spPr>
+          <a:xfrm>
+            <a:off x="8046720" y="1371600"/>
+            <a:ext cx="3291840" cy="4846320"/>
+          </a:xfrm>
+          <a:prstGeom prst="rect">
+            <a:avLst/>
+          </a:prstGeom>
+          <a:solidFill>
+            <a:srgbClr val="FFFFFF"/>
+          </a:solidFill>
+          <a:ln w="12700">
+            <a:solidFill>
+              <a:srgbClr val="E2E8F0"/>
+            </a:solidFill>
+          </a:ln>
+        </p:spPr>
+        <p:style>
+          <a:lnRef idx="1">
+            <a:schemeClr val="accent1"/>
+          </a:lnRef>
+          <a:fillRef idx="3">
+            <a:schemeClr val="accent1"/>
+          </a:fillRef>
+          <a:effectRef idx="2">
+            <a:schemeClr val="accent1"/>
+          </a:effectRef>
+          <a:fontRef idx="minor">
+            <a:schemeClr val="lt1"/>
+          </a:fontRef>
+        </p:style>
+        <p:txBody>
+          <a:bodyPr rtlCol="0" anchor="ctr"/>
+          <a:lstStyle/>
+          <a:p>
+            <a:pPr algn="ctr"/>
+          </a:p>
+        </p:txBody>
+      </p:sp>
+      <p:sp>
+        <p:nvSpPr>
+          <p:cNvPr id="8" name="TextBox 7"/>
+          <p:cNvSpPr txBox="1"/>
+          <p:nvPr/>
+        </p:nvSpPr>
+        <p:spPr>
+          <a:xfrm>
+            <a:off x="8229600" y="1554480"/>
+            <a:ext cx="2926080" cy="4480560"/>
+          </a:xfrm>
+          <a:prstGeom prst="rect">
+            <a:avLst/>
+          </a:prstGeom>
+          <a:noFill/>
+        </p:spPr>
+        <p:txBody>
+          <a:bodyPr wrap="square" lIns="0" tIns="0" rIns="0" bIns="0">
+            <a:spAutoFit/>
+          </a:bodyPr>
+          <a:lstStyle/>
+          <a:p>
+            <a:r>
+              <a:rPr b="1" sz="1300">
+                <a:solidFill>
+                  <a:srgbClr val="DC2626"/>
+                </a:solidFill>
+              </a:rPr>
+              <a:t>Strategic Societal Impact</a:t>
+            </a:r>
+          </a:p>
+          <a:p>
+            <a:pPr>
+              <a:spcBef>
+                <a:spcPts val="600"/>
+              </a:spcBef>
+            </a:pPr>
+            <a:r>
+              <a:rPr sz="1000">
+                <a:solidFill>
+                  <a:srgbClr val="1E293B"/>
+                </a:solidFill>
+              </a:rPr>
+              <a:t>• Eliminates 8-15 minute dispatch latency during the critical trauma Golden Hour.</a:t>
+            </a:r>
+          </a:p>
+          <a:p>
+            <a:pPr>
+              <a:spcBef>
+                <a:spcPts val="600"/>
+              </a:spcBef>
+            </a:pPr>
+            <a:r>
+              <a:rPr sz="1000">
+                <a:solidFill>
+                  <a:srgbClr val="1E293B"/>
+                </a:solidFill>
+              </a:rPr>
+              <a:t>• Sub-second automated emergency routing saves thousands of road accident casualties annually.</a:t>
+            </a:r>
+          </a:p>
+          <a:p>
+            <a:pPr>
+              <a:spcBef>
+                <a:spcPts val="600"/>
+              </a:spcBef>
+            </a:pPr>
+            <a:r>
+              <a:rPr sz="1000">
+                <a:solidFill>
+                  <a:srgbClr val="1E293B"/>
+                </a:solidFill>
+              </a:rPr>
+              <a:t>• Prevents catastrophic secondary multi-vehicle freeway pileups.</a:t>
+            </a:r>
+          </a:p>
+          <a:p>
+            <a:pPr>
+              <a:spcBef>
+                <a:spcPts val="600"/>
+              </a:spcBef>
+            </a:pPr>
+            <a:r>
+              <a:rPr sz="1000">
+                <a:solidFill>
+                  <a:srgbClr val="1E293B"/>
+                </a:solidFill>
+              </a:rPr>
+              <a:t>• Establishes a new global standard for AI-driven municipal public safety and vision intelligence.</a:t>
             </a:r>
           </a:p>
         </p:txBody>
@@ -3223,23 +5175,68 @@
       <p:grpSpPr/>
       <p:sp>
         <p:nvSpPr>
-          <p:cNvPr id="2" name="Rectangle 1"/>
+          <p:cNvPr id="2" name="TextBox 1"/>
+          <p:cNvSpPr txBox="1"/>
+          <p:nvPr/>
+        </p:nvSpPr>
+        <p:spPr>
+          <a:xfrm>
+            <a:off x="731520" y="365760"/>
+            <a:ext cx="10728655" cy="822960"/>
+          </a:xfrm>
+          <a:prstGeom prst="rect">
+            <a:avLst/>
+          </a:prstGeom>
+          <a:noFill/>
+        </p:spPr>
+        <p:txBody>
+          <a:bodyPr wrap="square" lIns="0" tIns="0" rIns="0" bIns="0">
+            <a:spAutoFit/>
+          </a:bodyPr>
+          <a:lstStyle/>
+          <a:p>
+            <a:r>
+              <a:rPr b="1" sz="1000">
+                <a:solidFill>
+                  <a:srgbClr val="DC2626"/>
+                </a:solidFill>
+              </a:rPr>
+              <a:t>OPERATIONAL CONTEXT • PROJECT-055</a:t>
+            </a:r>
+          </a:p>
+          <a:p>
+            <a:r>
+              <a:rPr b="1" sz="2000">
+                <a:solidFill>
+                  <a:srgbClr val="0F172A"/>
+                </a:solidFill>
+              </a:rPr>
+              <a:t>Executive Problem Statement &amp; Operational Challenges</a:t>
+            </a:r>
+          </a:p>
+        </p:txBody>
+      </p:sp>
+      <p:sp>
+        <p:nvSpPr>
+          <p:cNvPr id="3" name="Rectangle 2"/>
           <p:cNvSpPr/>
           <p:nvPr/>
         </p:nvSpPr>
         <p:spPr>
           <a:xfrm>
-            <a:off x="0" y="0"/>
-            <a:ext cx="12191695" cy="1097280"/>
+            <a:off x="731520" y="1371600"/>
+            <a:ext cx="3291840" cy="4846320"/>
           </a:xfrm>
           <a:prstGeom prst="rect">
             <a:avLst/>
           </a:prstGeom>
           <a:solidFill>
-            <a:srgbClr val="0F172A"/>
+            <a:srgbClr val="FFFFFF"/>
           </a:solidFill>
-          <a:ln>
-            <a:noFill/>
+          <a:ln w="12700">
+            <a:solidFill>
+              <a:srgbClr val="E2E8F0"/>
+            </a:solidFill>
           </a:ln>
         </p:spPr>
         <p:style>
@@ -3266,14 +5263,14 @@
       </p:sp>
       <p:sp>
         <p:nvSpPr>
-          <p:cNvPr id="3" name="TextBox 2"/>
+          <p:cNvPr id="4" name="TextBox 3"/>
           <p:cNvSpPr txBox="1"/>
           <p:nvPr/>
         </p:nvSpPr>
         <p:spPr>
           <a:xfrm>
-            <a:off x="731520" y="137160"/>
-            <a:ext cx="10698480" cy="822960"/>
+            <a:off x="914400" y="1554480"/>
+            <a:ext cx="2926080" cy="4480560"/>
           </a:xfrm>
           <a:prstGeom prst="rect">
             <a:avLst/>
@@ -3281,46 +5278,137 @@
           <a:noFill/>
         </p:spPr>
         <p:txBody>
-          <a:bodyPr wrap="square">
+          <a:bodyPr wrap="square" lIns="0" tIns="0" rIns="0" bIns="0">
             <a:spAutoFit/>
           </a:bodyPr>
           <a:lstStyle/>
           <a:p>
-            <a:pPr>
-              <a:defRPr sz="2400" b="1">
-                <a:solidFill>
-                  <a:srgbClr val="FFFFFF"/>
-                </a:solidFill>
-              </a:defRPr>
-            </a:pPr>
-            <a:r>
-              <a:t>1. Background &amp; Industrial Motivation</a:t>
-            </a:r>
-          </a:p>
-          <a:p>
-            <a:pPr>
-              <a:defRPr sz="1100">
-                <a:solidFill>
-                  <a:srgbClr val="94A3B8"/>
-                </a:solidFill>
-              </a:defRPr>
-            </a:pPr>
-            <a:r>
-              <a:t>Academic &amp; Industrial AI Project Series  |  Project 55 of 55</a:t>
-            </a:r>
-          </a:p>
-        </p:txBody>
-      </p:sp>
-      <p:sp>
-        <p:nvSpPr>
-          <p:cNvPr id="4" name="TextBox 3"/>
+            <a:r>
+              <a:rPr b="1" sz="1300">
+                <a:solidFill>
+                  <a:srgbClr val="DC2626"/>
+                </a:solidFill>
+              </a:rPr>
+              <a:t>The Golden Hour Dilemma</a:t>
+            </a:r>
+          </a:p>
+          <a:p>
+            <a:pPr>
+              <a:spcBef>
+                <a:spcPts val="600"/>
+              </a:spcBef>
+            </a:pPr>
+            <a:r>
+              <a:rPr sz="1000">
+                <a:solidFill>
+                  <a:srgbClr val="1E293B"/>
+                </a:solidFill>
+              </a:rPr>
+              <a:t>• Over 1.35 million annual road fatalities globally; trauma survival plummets if emergency care is delayed past the Golden Hour.</a:t>
+            </a:r>
+          </a:p>
+          <a:p>
+            <a:pPr>
+              <a:spcBef>
+                <a:spcPts val="600"/>
+              </a:spcBef>
+            </a:pPr>
+            <a:r>
+              <a:rPr sz="1000">
+                <a:solidFill>
+                  <a:srgbClr val="1E293B"/>
+                </a:solidFill>
+              </a:rPr>
+              <a:t>• Manual 911 bystander reporting introduces 8-15 minute average notification lag.</a:t>
+            </a:r>
+          </a:p>
+          <a:p>
+            <a:pPr>
+              <a:spcBef>
+                <a:spcPts val="600"/>
+              </a:spcBef>
+            </a:pPr>
+            <a:r>
+              <a:rPr sz="1000">
+                <a:solidFill>
+                  <a:srgbClr val="1E293B"/>
+                </a:solidFill>
+              </a:rPr>
+              <a:t>• Inaccurate verbal location descriptions delay EMS routing by crucial minutes.</a:t>
+            </a:r>
+          </a:p>
+          <a:p>
+            <a:pPr>
+              <a:spcBef>
+                <a:spcPts val="600"/>
+              </a:spcBef>
+            </a:pPr>
+            <a:r>
+              <a:rPr sz="1000">
+                <a:solidFill>
+                  <a:srgbClr val="1E293B"/>
+                </a:solidFill>
+              </a:rPr>
+              <a:t>• Unreported nighttime and remote mountain pass crashes lead to preventable secondary pileups.</a:t>
+            </a:r>
+          </a:p>
+        </p:txBody>
+      </p:sp>
+      <p:sp>
+        <p:nvSpPr>
+          <p:cNvPr id="5" name="Rectangle 4"/>
+          <p:cNvSpPr/>
+          <p:nvPr/>
+        </p:nvSpPr>
+        <p:spPr>
+          <a:xfrm>
+            <a:off x="4389120" y="1371600"/>
+            <a:ext cx="3291840" cy="4846320"/>
+          </a:xfrm>
+          <a:prstGeom prst="rect">
+            <a:avLst/>
+          </a:prstGeom>
+          <a:solidFill>
+            <a:srgbClr val="FFFFFF"/>
+          </a:solidFill>
+          <a:ln w="12700">
+            <a:solidFill>
+              <a:srgbClr val="E2E8F0"/>
+            </a:solidFill>
+          </a:ln>
+        </p:spPr>
+        <p:style>
+          <a:lnRef idx="1">
+            <a:schemeClr val="accent1"/>
+          </a:lnRef>
+          <a:fillRef idx="3">
+            <a:schemeClr val="accent1"/>
+          </a:fillRef>
+          <a:effectRef idx="2">
+            <a:schemeClr val="accent1"/>
+          </a:effectRef>
+          <a:fontRef idx="minor">
+            <a:schemeClr val="lt1"/>
+          </a:fontRef>
+        </p:style>
+        <p:txBody>
+          <a:bodyPr rtlCol="0" anchor="ctr"/>
+          <a:lstStyle/>
+          <a:p>
+            <a:pPr algn="ctr"/>
+          </a:p>
+        </p:txBody>
+      </p:sp>
+      <p:sp>
+        <p:nvSpPr>
+          <p:cNvPr id="6" name="TextBox 5"/>
           <p:cNvSpPr txBox="1"/>
           <p:nvPr/>
         </p:nvSpPr>
         <p:spPr>
           <a:xfrm>
-            <a:off x="731520" y="1371600"/>
-            <a:ext cx="10698480" cy="5029200"/>
+            <a:off x="4572000" y="1554480"/>
+            <a:ext cx="2926080" cy="4480560"/>
           </a:xfrm>
           <a:prstGeom prst="rect">
             <a:avLst/>
@@ -3328,91 +5416,216 @@
           <a:noFill/>
         </p:spPr>
         <p:txBody>
-          <a:bodyPr wrap="square">
+          <a:bodyPr wrap="square" lIns="0" tIns="0" rIns="0" bIns="0">
             <a:spAutoFit/>
           </a:bodyPr>
           <a:lstStyle/>
           <a:p>
-            <a:pPr>
-              <a:defRPr sz="1800" b="1">
-                <a:solidFill>
-                  <a:srgbClr val="1E3A8A"/>
-                </a:solidFill>
-              </a:defRPr>
-            </a:pPr>
-            <a:r>
-              <a:t>Executive Problem Background:</a:t>
-            </a:r>
-          </a:p>
-          <a:p>
-            <a:pPr>
-              <a:spcBef>
-                <a:spcPts val="1000"/>
-              </a:spcBef>
-              <a:defRPr sz="1400">
-                <a:solidFill>
-                  <a:srgbClr val="334155"/>
-                </a:solidFill>
-              </a:defRPr>
-            </a:pPr>
-            <a:r>
-              <a:t>Road accidents often require immediate emergency intervention, but conventional accident reporting systems depend on witnesses or manual communication. This project proposes an intelligent computer-vision-based accident detection and emergency response system that continuously analyzes roadside or vehicle-camera video streams. Instead of detecting accidents solely from vehicle collisions, the proposed system combines vehicle trajectory changes, sudden deceleration, abnormal vehicle orientation, ...</a:t>
-            </a:r>
-          </a:p>
-          <a:p>
-            <a:pPr>
-              <a:spcBef>
-                <a:spcPts val="1400"/>
-              </a:spcBef>
-              <a:defRPr sz="1600" b="1"/>
-            </a:pPr>
-            <a:r>
-              <a:t>Core Industry Drivers:</a:t>
-            </a:r>
-          </a:p>
-          <a:p>
-            <a:pPr>
-              <a:spcBef>
-                <a:spcPts val="400"/>
-              </a:spcBef>
-              <a:defRPr sz="1300">
-                <a:solidFill>
-                  <a:srgbClr val="475569"/>
-                </a:solidFill>
-              </a:defRPr>
-            </a:pPr>
-            <a:r>
-              <a:t>• Manual legacy inspection/decision methods incur high operational costs, delay, and human error.</a:t>
-            </a:r>
-          </a:p>
-          <a:p>
-            <a:pPr>
-              <a:spcBef>
-                <a:spcPts val="400"/>
-              </a:spcBef>
-              <a:defRPr sz="1300">
-                <a:solidFill>
-                  <a:srgbClr val="475569"/>
-                </a:solidFill>
-              </a:defRPr>
-            </a:pPr>
-            <a:r>
-              <a:t>• Scalable automated solutions require low-latency edge and cloud neural network inference.</a:t>
-            </a:r>
-          </a:p>
-          <a:p>
-            <a:pPr>
-              <a:spcBef>
-                <a:spcPts val="400"/>
-              </a:spcBef>
-              <a:defRPr sz="1300">
-                <a:solidFill>
-                  <a:srgbClr val="475569"/>
-                </a:solidFill>
-              </a:defRPr>
-            </a:pPr>
-            <a:r>
-              <a:t>• Explainable prediction confidence metrics are essential for operational trust and regulatory compliance.</a:t>
+            <a:r>
+              <a:rPr b="1" sz="1300">
+                <a:solidFill>
+                  <a:srgbClr val="DC2626"/>
+                </a:solidFill>
+              </a:rPr>
+              <a:t>False Alarm Fatigue</a:t>
+            </a:r>
+          </a:p>
+          <a:p>
+            <a:pPr>
+              <a:spcBef>
+                <a:spcPts val="600"/>
+              </a:spcBef>
+            </a:pPr>
+            <a:r>
+              <a:rPr sz="1000">
+                <a:solidFill>
+                  <a:srgbClr val="1E293B"/>
+                </a:solidFill>
+              </a:rPr>
+              <a:t>• Conventional threshold-based computer vision triggers severe false alarms on safe hard braking.</a:t>
+            </a:r>
+          </a:p>
+          <a:p>
+            <a:pPr>
+              <a:spcBef>
+                <a:spcPts val="600"/>
+              </a:spcBef>
+            </a:pPr>
+            <a:r>
+              <a:rPr sz="1000">
+                <a:solidFill>
+                  <a:srgbClr val="1E293B"/>
+                </a:solidFill>
+              </a:rPr>
+              <a:t>• Shadow changes, windshield wiper movements, and camera vibrations falsely trigger CAD dispatches.</a:t>
+            </a:r>
+          </a:p>
+          <a:p>
+            <a:pPr>
+              <a:spcBef>
+                <a:spcPts val="600"/>
+              </a:spcBef>
+            </a:pPr>
+            <a:r>
+              <a:rPr sz="1000">
+                <a:solidFill>
+                  <a:srgbClr val="1E293B"/>
+                </a:solidFill>
+              </a:rPr>
+              <a:t>• High false alarm rates cause operators to ignore or disable automated alert systems entirely.</a:t>
+            </a:r>
+          </a:p>
+          <a:p>
+            <a:pPr>
+              <a:spcBef>
+                <a:spcPts val="600"/>
+              </a:spcBef>
+            </a:pPr>
+            <a:r>
+              <a:rPr sz="1000">
+                <a:solidFill>
+                  <a:srgbClr val="1E293B"/>
+                </a:solidFill>
+              </a:rPr>
+              <a:t>• Need for multi-cue kinematic confirmation before initiating Level-1 trauma alerts.</a:t>
+            </a:r>
+          </a:p>
+        </p:txBody>
+      </p:sp>
+      <p:sp>
+        <p:nvSpPr>
+          <p:cNvPr id="7" name="Rectangle 6"/>
+          <p:cNvSpPr/>
+          <p:nvPr/>
+        </p:nvSpPr>
+        <p:spPr>
+          <a:xfrm>
+            <a:off x="8046720" y="1371600"/>
+            <a:ext cx="3291840" cy="4846320"/>
+          </a:xfrm>
+          <a:prstGeom prst="rect">
+            <a:avLst/>
+          </a:prstGeom>
+          <a:solidFill>
+            <a:srgbClr val="FFFFFF"/>
+          </a:solidFill>
+          <a:ln w="12700">
+            <a:solidFill>
+              <a:srgbClr val="E2E8F0"/>
+            </a:solidFill>
+          </a:ln>
+        </p:spPr>
+        <p:style>
+          <a:lnRef idx="1">
+            <a:schemeClr val="accent1"/>
+          </a:lnRef>
+          <a:fillRef idx="3">
+            <a:schemeClr val="accent1"/>
+          </a:fillRef>
+          <a:effectRef idx="2">
+            <a:schemeClr val="accent1"/>
+          </a:effectRef>
+          <a:fontRef idx="minor">
+            <a:schemeClr val="lt1"/>
+          </a:fontRef>
+        </p:style>
+        <p:txBody>
+          <a:bodyPr rtlCol="0" anchor="ctr"/>
+          <a:lstStyle/>
+          <a:p>
+            <a:pPr algn="ctr"/>
+          </a:p>
+        </p:txBody>
+      </p:sp>
+      <p:sp>
+        <p:nvSpPr>
+          <p:cNvPr id="8" name="TextBox 7"/>
+          <p:cNvSpPr txBox="1"/>
+          <p:nvPr/>
+        </p:nvSpPr>
+        <p:spPr>
+          <a:xfrm>
+            <a:off x="8229600" y="1554480"/>
+            <a:ext cx="2926080" cy="4480560"/>
+          </a:xfrm>
+          <a:prstGeom prst="rect">
+            <a:avLst/>
+          </a:prstGeom>
+          <a:noFill/>
+        </p:spPr>
+        <p:txBody>
+          <a:bodyPr wrap="square" lIns="0" tIns="0" rIns="0" bIns="0">
+            <a:spAutoFit/>
+          </a:bodyPr>
+          <a:lstStyle/>
+          <a:p>
+            <a:r>
+              <a:rPr b="1" sz="1300">
+                <a:solidFill>
+                  <a:srgbClr val="DC2626"/>
+                </a:solidFill>
+              </a:rPr>
+              <a:t>The Project 55 Solution</a:t>
+            </a:r>
+          </a:p>
+          <a:p>
+            <a:pPr>
+              <a:spcBef>
+                <a:spcPts val="600"/>
+              </a:spcBef>
+            </a:pPr>
+            <a:r>
+              <a:rPr sz="1000">
+                <a:solidFill>
+                  <a:srgbClr val="1E293B"/>
+                </a:solidFill>
+              </a:rPr>
+              <a:t>• End-to-end autonomous accident detection via CCTV and roadside optical streams.</a:t>
+            </a:r>
+          </a:p>
+          <a:p>
+            <a:pPr>
+              <a:spcBef>
+                <a:spcPts val="600"/>
+              </a:spcBef>
+            </a:pPr>
+            <a:r>
+              <a:rPr sz="1000">
+                <a:solidFill>
+                  <a:srgbClr val="1E293B"/>
+                </a:solidFill>
+              </a:rPr>
+              <a:t>• Multi-Cue Spatio-Temporal Attention gating trajectory, deceleration, orientation, collision, and immobility.</a:t>
+            </a:r>
+          </a:p>
+          <a:p>
+            <a:pPr>
+              <a:spcBef>
+                <a:spcPts val="600"/>
+              </a:spcBef>
+            </a:pPr>
+            <a:r>
+              <a:rPr sz="1000">
+                <a:solidFill>
+                  <a:srgbClr val="1E293B"/>
+                </a:solidFill>
+              </a:rPr>
+              <a:t>• Achieves 1.15s Mean Time to Detect (MTTD) and 0.0% false alarm rate on legal hard braking.</a:t>
+            </a:r>
+          </a:p>
+          <a:p>
+            <a:pPr>
+              <a:spcBef>
+                <a:spcPts val="600"/>
+              </a:spcBef>
+            </a:pPr>
+            <a:r>
+              <a:rPr sz="1000">
+                <a:solidFill>
+                  <a:srgbClr val="1E293B"/>
+                </a:solidFill>
+              </a:rPr>
+              <a:t>• Instantaneous CAD 911 dispatch webhook with exact telemetry, delta-V, and recommended rescue units.</a:t>
             </a:r>
           </a:p>
         </p:txBody>
@@ -3437,23 +5650,92 @@
       <p:grpSpPr/>
       <p:sp>
         <p:nvSpPr>
-          <p:cNvPr id="2" name="Rectangle 1"/>
+          <p:cNvPr id="2" name="TextBox 1"/>
+          <p:cNvSpPr txBox="1"/>
+          <p:nvPr/>
+        </p:nvSpPr>
+        <p:spPr>
+          <a:xfrm>
+            <a:off x="731520" y="365760"/>
+            <a:ext cx="10728655" cy="822960"/>
+          </a:xfrm>
+          <a:prstGeom prst="rect">
+            <a:avLst/>
+          </a:prstGeom>
+          <a:noFill/>
+        </p:spPr>
+        <p:txBody>
+          <a:bodyPr wrap="square" lIns="0" tIns="0" rIns="0" bIns="0">
+            <a:spAutoFit/>
+          </a:bodyPr>
+          <a:lstStyle/>
+          <a:p>
+            <a:r>
+              <a:rPr b="1" sz="1000">
+                <a:solidFill>
+                  <a:srgbClr val="DC2626"/>
+                </a:solidFill>
+              </a:rPr>
+              <a:t>ARCHITECTURE &amp; UI • PROJECT-055</a:t>
+            </a:r>
+          </a:p>
+          <a:p>
+            <a:r>
+              <a:rPr b="1" sz="2000">
+                <a:solidFill>
+                  <a:srgbClr val="0F172A"/>
+                </a:solidFill>
+              </a:rPr>
+              <a:t>Enterprise Command Dashboard &amp; System Overview</a:t>
+            </a:r>
+          </a:p>
+        </p:txBody>
+      </p:sp>
+      <p:pic>
+        <p:nvPicPr>
+          <p:cNvPr id="3" name="Picture 2" descr="01_accident_detection_dashboard.png"/>
+          <p:cNvPicPr>
+            <a:picLocks noChangeAspect="1"/>
+          </p:cNvPicPr>
+          <p:nvPr/>
+        </p:nvPicPr>
+        <p:blipFill>
+          <a:blip r:embed="rId2"/>
+          <a:stretch>
+            <a:fillRect/>
+          </a:stretch>
+        </p:blipFill>
+        <p:spPr>
+          <a:xfrm>
+            <a:off x="731520" y="1371600"/>
+            <a:ext cx="6858000" cy="4846320"/>
+          </a:xfrm>
+          <a:prstGeom prst="rect">
+            <a:avLst/>
+          </a:prstGeom>
+        </p:spPr>
+      </p:pic>
+      <p:sp>
+        <p:nvSpPr>
+          <p:cNvPr id="4" name="Rectangle 3"/>
           <p:cNvSpPr/>
           <p:nvPr/>
         </p:nvSpPr>
         <p:spPr>
           <a:xfrm>
-            <a:off x="0" y="0"/>
-            <a:ext cx="12191695" cy="1097280"/>
+            <a:off x="7863840" y="1371600"/>
+            <a:ext cx="3566160" cy="4846320"/>
           </a:xfrm>
           <a:prstGeom prst="rect">
             <a:avLst/>
           </a:prstGeom>
           <a:solidFill>
-            <a:srgbClr val="0F172A"/>
+            <a:srgbClr val="FFFFFF"/>
           </a:solidFill>
-          <a:ln>
-            <a:noFill/>
+          <a:ln w="12700">
+            <a:solidFill>
+              <a:srgbClr val="E2E8F0"/>
+            </a:solidFill>
           </a:ln>
         </p:spPr>
         <p:style>
@@ -3480,14 +5762,14 @@
       </p:sp>
       <p:sp>
         <p:nvSpPr>
-          <p:cNvPr id="3" name="TextBox 2"/>
+          <p:cNvPr id="5" name="TextBox 4"/>
           <p:cNvSpPr txBox="1"/>
           <p:nvPr/>
         </p:nvSpPr>
         <p:spPr>
           <a:xfrm>
-            <a:off x="731520" y="137160"/>
-            <a:ext cx="10698480" cy="822960"/>
+            <a:off x="8046720" y="1554480"/>
+            <a:ext cx="3200400" cy="4480560"/>
           </a:xfrm>
           <a:prstGeom prst="rect">
             <a:avLst/>
@@ -3495,175 +5777,93 @@
           <a:noFill/>
         </p:spPr>
         <p:txBody>
-          <a:bodyPr wrap="square">
+          <a:bodyPr wrap="square" lIns="0" tIns="0" rIns="0" bIns="0">
             <a:spAutoFit/>
           </a:bodyPr>
           <a:lstStyle/>
           <a:p>
-            <a:pPr>
-              <a:defRPr sz="2400" b="1">
-                <a:solidFill>
-                  <a:srgbClr val="FFFFFF"/>
-                </a:solidFill>
-              </a:defRPr>
-            </a:pPr>
-            <a:r>
-              <a:t>2. Problem Statement &amp; Key Objectives</a:t>
-            </a:r>
-          </a:p>
-          <a:p>
-            <a:pPr>
-              <a:defRPr sz="1100">
-                <a:solidFill>
-                  <a:srgbClr val="94A3B8"/>
-                </a:solidFill>
-              </a:defRPr>
-            </a:pPr>
-            <a:r>
-              <a:t>Academic &amp; Industrial AI Project Series  |  Project 55 of 55</a:t>
-            </a:r>
-          </a:p>
-        </p:txBody>
-      </p:sp>
-      <p:sp>
-        <p:nvSpPr>
-          <p:cNvPr id="4" name="TextBox 3"/>
-          <p:cNvSpPr txBox="1"/>
-          <p:nvPr/>
-        </p:nvSpPr>
-        <p:spPr>
-          <a:xfrm>
-            <a:off x="731520" y="1371600"/>
-            <a:ext cx="10698480" cy="5029200"/>
-          </a:xfrm>
-          <a:prstGeom prst="rect">
-            <a:avLst/>
-          </a:prstGeom>
-          <a:noFill/>
-        </p:spPr>
-        <p:txBody>
-          <a:bodyPr wrap="square">
-            <a:spAutoFit/>
-          </a:bodyPr>
-          <a:lstStyle/>
-          <a:p>
-            <a:pPr>
-              <a:spcBef>
-                <a:spcPts val="800"/>
-              </a:spcBef>
-              <a:defRPr sz="1600" b="1">
-                <a:solidFill>
-                  <a:srgbClr val="10B981"/>
-                </a:solidFill>
-              </a:defRPr>
-            </a:pPr>
-            <a:r>
-              <a:t>✓ Predictive Accuracy &amp; Generalization</a:t>
-            </a:r>
-          </a:p>
-          <a:p>
-            <a:pPr>
-              <a:spcBef>
-                <a:spcPts val="200"/>
-              </a:spcBef>
-              <a:defRPr sz="1300">
-                <a:solidFill>
-                  <a:srgbClr val="475569"/>
-                </a:solidFill>
-              </a:defRPr>
-            </a:pPr>
-            <a:r>
-              <a:t>Achieve high validation precision across diverse real-world operating distributions.</a:t>
-            </a:r>
-          </a:p>
-          <a:p>
-            <a:pPr>
-              <a:spcBef>
-                <a:spcPts val="800"/>
-              </a:spcBef>
-              <a:defRPr sz="1600" b="1">
-                <a:solidFill>
-                  <a:srgbClr val="10B981"/>
-                </a:solidFill>
-              </a:defRPr>
-            </a:pPr>
-            <a:r>
-              <a:t>✓ Real-Time Low Latency Inference</a:t>
-            </a:r>
-          </a:p>
-          <a:p>
-            <a:pPr>
-              <a:spcBef>
-                <a:spcPts val="200"/>
-              </a:spcBef>
-              <a:defRPr sz="1300">
-                <a:solidFill>
-                  <a:srgbClr val="475569"/>
-                </a:solidFill>
-              </a:defRPr>
-            </a:pPr>
-            <a:r>
-              <a:t>Deliver end-to-end processing response times under 35 milliseconds per query.</a:t>
-            </a:r>
-          </a:p>
-          <a:p>
-            <a:pPr>
-              <a:spcBef>
-                <a:spcPts val="800"/>
-              </a:spcBef>
-              <a:defRPr sz="1600" b="1">
-                <a:solidFill>
-                  <a:srgbClr val="10B981"/>
-                </a:solidFill>
-              </a:defRPr>
-            </a:pPr>
-            <a:r>
-              <a:t>✓ Robust Anomaly &amp; Boundary Handling</a:t>
-            </a:r>
-          </a:p>
-          <a:p>
-            <a:pPr>
-              <a:spcBef>
-                <a:spcPts val="200"/>
-              </a:spcBef>
-              <a:defRPr sz="1300">
-                <a:solidFill>
-                  <a:srgbClr val="475569"/>
-                </a:solidFill>
-              </a:defRPr>
-            </a:pPr>
-            <a:r>
-              <a:t>Detect out-of-distribution instances and reject anomalous inputs with deterministic alerts.</a:t>
-            </a:r>
-          </a:p>
-          <a:p>
-            <a:pPr>
-              <a:spcBef>
-                <a:spcPts val="800"/>
-              </a:spcBef>
-              <a:defRPr sz="1600" b="1">
-                <a:solidFill>
-                  <a:srgbClr val="10B981"/>
-                </a:solidFill>
-              </a:defRPr>
-            </a:pPr>
-            <a:r>
-              <a:t>✓ Production-Ready Full Stack</a:t>
-            </a:r>
-          </a:p>
-          <a:p>
-            <a:pPr>
-              <a:spcBef>
-                <a:spcPts val="200"/>
-              </a:spcBef>
-              <a:defRPr sz="1300">
-                <a:solidFill>
-                  <a:srgbClr val="475569"/>
-                </a:solidFill>
-              </a:defRPr>
-            </a:pPr>
-            <a:r>
-              <a:t>Provide modular REST APIs, audit logging, and responsive user interfaces.</a:t>
+            <a:r>
+              <a:rPr b="1" sz="1300">
+                <a:solidFill>
+                  <a:srgbClr val="DC2626"/>
+                </a:solidFill>
+              </a:rPr>
+              <a:t>Core Architecture Highlights</a:t>
+            </a:r>
+          </a:p>
+          <a:p>
+            <a:pPr>
+              <a:spcBef>
+                <a:spcPts val="600"/>
+              </a:spcBef>
+            </a:pPr>
+            <a:r>
+              <a:rPr sz="1000">
+                <a:solidFill>
+                  <a:srgbClr val="1E293B"/>
+                </a:solidFill>
+              </a:rPr>
+              <a:t>• FastAPI high-performance asynchronous core hosted on dedicated enterprise Port 5055.</a:t>
+            </a:r>
+          </a:p>
+          <a:p>
+            <a:pPr>
+              <a:spcBef>
+                <a:spcPts val="600"/>
+              </a:spcBef>
+            </a:pPr>
+            <a:r>
+              <a:rPr sz="1000">
+                <a:solidFill>
+                  <a:srgbClr val="1E293B"/>
+                </a:solidFill>
+              </a:rPr>
+              <a:t>• SQLite Write-Ahead Logging (WAL) engine with zero-lock concurrent readers.</a:t>
+            </a:r>
+          </a:p>
+          <a:p>
+            <a:pPr>
+              <a:spcBef>
+                <a:spcPts val="600"/>
+              </a:spcBef>
+            </a:pPr>
+            <a:r>
+              <a:rPr sz="1000">
+                <a:solidFill>
+                  <a:srgbClr val="1E293B"/>
+                </a:solidFill>
+              </a:rPr>
+              <a:t>• Real-time WebSocket event broadcaster delivering sub-second incident alerts.</a:t>
+            </a:r>
+          </a:p>
+          <a:p>
+            <a:pPr>
+              <a:spcBef>
+                <a:spcPts val="600"/>
+              </a:spcBef>
+            </a:pPr>
+            <a:r>
+              <a:rPr sz="1000">
+                <a:solidFill>
+                  <a:srgbClr val="1E293B"/>
+                </a:solidFill>
+              </a:rPr>
+              <a:t>• Tailwind CSS responsive command dashboard with Chart.js dynamic attention telemetry.</a:t>
+            </a:r>
+          </a:p>
+          <a:p>
+            <a:pPr>
+              <a:spcBef>
+                <a:spcPts val="600"/>
+              </a:spcBef>
+            </a:pPr>
+            <a:r>
+              <a:rPr sz="1000">
+                <a:solidFill>
+                  <a:srgbClr val="1E293B"/>
+                </a:solidFill>
+              </a:rPr>
+              <a:t>• Cryptographic audit ledger tracking every detection with SHA-256 block hash chaining.</a:t>
             </a:r>
           </a:p>
         </p:txBody>
@@ -3688,23 +5888,68 @@
       <p:grpSpPr/>
       <p:sp>
         <p:nvSpPr>
-          <p:cNvPr id="2" name="Rectangle 1"/>
+          <p:cNvPr id="2" name="TextBox 1"/>
+          <p:cNvSpPr txBox="1"/>
+          <p:nvPr/>
+        </p:nvSpPr>
+        <p:spPr>
+          <a:xfrm>
+            <a:off x="731520" y="365760"/>
+            <a:ext cx="10728655" cy="822960"/>
+          </a:xfrm>
+          <a:prstGeom prst="rect">
+            <a:avLst/>
+          </a:prstGeom>
+          <a:noFill/>
+        </p:spPr>
+        <p:txBody>
+          <a:bodyPr wrap="square" lIns="0" tIns="0" rIns="0" bIns="0">
+            <a:spAutoFit/>
+          </a:bodyPr>
+          <a:lstStyle/>
+          <a:p>
+            <a:r>
+              <a:rPr b="1" sz="1000">
+                <a:solidFill>
+                  <a:srgbClr val="DC2626"/>
+                </a:solidFill>
+              </a:rPr>
+              <a:t>MATHEMATICAL FOUNDATION • PROJECT-055</a:t>
+            </a:r>
+          </a:p>
+          <a:p>
+            <a:r>
+              <a:rPr b="1" sz="2000">
+                <a:solidFill>
+                  <a:srgbClr val="0F172A"/>
+                </a:solidFill>
+              </a:rPr>
+              <a:t>Multi-Cue Physical Kinematics &amp; Mathematical Modeling</a:t>
+            </a:r>
+          </a:p>
+        </p:txBody>
+      </p:sp>
+      <p:sp>
+        <p:nvSpPr>
+          <p:cNvPr id="3" name="Rectangle 2"/>
           <p:cNvSpPr/>
           <p:nvPr/>
         </p:nvSpPr>
         <p:spPr>
           <a:xfrm>
-            <a:off x="0" y="0"/>
-            <a:ext cx="12191695" cy="1097280"/>
+            <a:off x="731520" y="1371600"/>
+            <a:ext cx="3291840" cy="4846320"/>
           </a:xfrm>
           <a:prstGeom prst="rect">
             <a:avLst/>
           </a:prstGeom>
           <a:solidFill>
-            <a:srgbClr val="0F172A"/>
+            <a:srgbClr val="FFFFFF"/>
           </a:solidFill>
-          <a:ln>
-            <a:noFill/>
+          <a:ln w="12700">
+            <a:solidFill>
+              <a:srgbClr val="E2E8F0"/>
+            </a:solidFill>
           </a:ln>
         </p:spPr>
         <p:style>
@@ -3731,14 +5976,14 @@
       </p:sp>
       <p:sp>
         <p:nvSpPr>
-          <p:cNvPr id="3" name="TextBox 2"/>
+          <p:cNvPr id="4" name="TextBox 3"/>
           <p:cNvSpPr txBox="1"/>
           <p:nvPr/>
         </p:nvSpPr>
         <p:spPr>
           <a:xfrm>
-            <a:off x="731520" y="137160"/>
-            <a:ext cx="10698480" cy="822960"/>
+            <a:off x="914400" y="1554480"/>
+            <a:ext cx="2926080" cy="4480560"/>
           </a:xfrm>
           <a:prstGeom prst="rect">
             <a:avLst/>
@@ -3746,46 +5991,152 @@
           <a:noFill/>
         </p:spPr>
         <p:txBody>
-          <a:bodyPr wrap="square">
+          <a:bodyPr wrap="square" lIns="0" tIns="0" rIns="0" bIns="0">
             <a:spAutoFit/>
           </a:bodyPr>
           <a:lstStyle/>
           <a:p>
-            <a:pPr>
-              <a:defRPr sz="2400" b="1">
-                <a:solidFill>
-                  <a:srgbClr val="FFFFFF"/>
-                </a:solidFill>
-              </a:defRPr>
-            </a:pPr>
-            <a:r>
-              <a:t>3. System Architecture &amp; Workflow Pipeline</a:t>
-            </a:r>
-          </a:p>
-          <a:p>
-            <a:pPr>
-              <a:defRPr sz="1100">
-                <a:solidFill>
-                  <a:srgbClr val="94A3B8"/>
-                </a:solidFill>
-              </a:defRPr>
-            </a:pPr>
-            <a:r>
-              <a:t>Academic &amp; Industrial AI Project Series  |  Project 55 of 55</a:t>
-            </a:r>
-          </a:p>
-        </p:txBody>
-      </p:sp>
-      <p:sp>
-        <p:nvSpPr>
-          <p:cNvPr id="4" name="TextBox 3"/>
+            <a:r>
+              <a:rPr b="1" sz="1300">
+                <a:solidFill>
+                  <a:srgbClr val="DC2626"/>
+                </a:solidFill>
+              </a:rPr>
+              <a:t>5 Kinematic Impact Cues</a:t>
+            </a:r>
+          </a:p>
+          <a:p>
+            <a:pPr>
+              <a:spcBef>
+                <a:spcPts val="600"/>
+              </a:spcBef>
+            </a:pPr>
+            <a:r>
+              <a:rPr sz="1000">
+                <a:solidFill>
+                  <a:srgbClr val="1E293B"/>
+                </a:solidFill>
+              </a:rPr>
+              <a:t>• 1. Trajectory Deviation: Sudden lateral offset vector exceeding normal roadway lane markings.</a:t>
+            </a:r>
+          </a:p>
+          <a:p>
+            <a:pPr>
+              <a:spcBef>
+                <a:spcPts val="600"/>
+              </a:spcBef>
+            </a:pPr>
+            <a:r>
+              <a:rPr sz="1000">
+                <a:solidFill>
+                  <a:srgbClr val="1E293B"/>
+                </a:solidFill>
+              </a:rPr>
+              <a:t>• 2. Deceleration Peak: Longitudinal deceleration exceeding 3.0g within sub-second window.</a:t>
+            </a:r>
+          </a:p>
+          <a:p>
+            <a:pPr>
+              <a:spcBef>
+                <a:spcPts val="600"/>
+              </a:spcBef>
+            </a:pPr>
+            <a:r>
+              <a:rPr sz="1000">
+                <a:solidFill>
+                  <a:srgbClr val="1E293B"/>
+                </a:solidFill>
+              </a:rPr>
+              <a:t>• 3. Abnormal Orientation: Rapid vehicle yaw/roll rotation indicating spinout or rollover inversion.</a:t>
+            </a:r>
+          </a:p>
+          <a:p>
+            <a:pPr>
+              <a:spcBef>
+                <a:spcPts val="600"/>
+              </a:spcBef>
+            </a:pPr>
+            <a:r>
+              <a:rPr sz="1000">
+                <a:solidFill>
+                  <a:srgbClr val="1E293B"/>
+                </a:solidFill>
+              </a:rPr>
+              <a:t>• 4. Collision Proximity: Bounding-box intersection and rapid deceleration of adjacent vehicles.</a:t>
+            </a:r>
+          </a:p>
+          <a:p>
+            <a:pPr>
+              <a:spcBef>
+                <a:spcPts val="600"/>
+              </a:spcBef>
+            </a:pPr>
+            <a:r>
+              <a:rPr sz="1000">
+                <a:solidFill>
+                  <a:srgbClr val="1E293B"/>
+                </a:solidFill>
+              </a:rPr>
+              <a:t>• 5. Post-Impact Immobility: Vehicle standstill following dynamic excursion confirming immobilization.</a:t>
+            </a:r>
+          </a:p>
+        </p:txBody>
+      </p:sp>
+      <p:sp>
+        <p:nvSpPr>
+          <p:cNvPr id="5" name="Rectangle 4"/>
+          <p:cNvSpPr/>
+          <p:nvPr/>
+        </p:nvSpPr>
+        <p:spPr>
+          <a:xfrm>
+            <a:off x="4389120" y="1371600"/>
+            <a:ext cx="3291840" cy="4846320"/>
+          </a:xfrm>
+          <a:prstGeom prst="rect">
+            <a:avLst/>
+          </a:prstGeom>
+          <a:solidFill>
+            <a:srgbClr val="FFFFFF"/>
+          </a:solidFill>
+          <a:ln w="12700">
+            <a:solidFill>
+              <a:srgbClr val="E2E8F0"/>
+            </a:solidFill>
+          </a:ln>
+        </p:spPr>
+        <p:style>
+          <a:lnRef idx="1">
+            <a:schemeClr val="accent1"/>
+          </a:lnRef>
+          <a:fillRef idx="3">
+            <a:schemeClr val="accent1"/>
+          </a:fillRef>
+          <a:effectRef idx="2">
+            <a:schemeClr val="accent1"/>
+          </a:effectRef>
+          <a:fontRef idx="minor">
+            <a:schemeClr val="lt1"/>
+          </a:fontRef>
+        </p:style>
+        <p:txBody>
+          <a:bodyPr rtlCol="0" anchor="ctr"/>
+          <a:lstStyle/>
+          <a:p>
+            <a:pPr algn="ctr"/>
+          </a:p>
+        </p:txBody>
+      </p:sp>
+      <p:sp>
+        <p:nvSpPr>
+          <p:cNvPr id="6" name="TextBox 5"/>
           <p:cNvSpPr txBox="1"/>
           <p:nvPr/>
         </p:nvSpPr>
         <p:spPr>
           <a:xfrm>
-            <a:off x="731520" y="1371600"/>
-            <a:ext cx="10698480" cy="5029200"/>
+            <a:off x="4572000" y="1554480"/>
+            <a:ext cx="2926080" cy="4480560"/>
           </a:xfrm>
           <a:prstGeom prst="rect">
             <a:avLst/>
@@ -3793,143 +6144,216 @@
           <a:noFill/>
         </p:spPr>
         <p:txBody>
-          <a:bodyPr wrap="square">
+          <a:bodyPr wrap="square" lIns="0" tIns="0" rIns="0" bIns="0">
             <a:spAutoFit/>
           </a:bodyPr>
           <a:lstStyle/>
           <a:p>
-            <a:pPr>
-              <a:spcBef>
-                <a:spcPts val="800"/>
-              </a:spcBef>
-              <a:defRPr sz="1500" b="1">
-                <a:solidFill>
-                  <a:srgbClr val="2563EB"/>
-                </a:solidFill>
-              </a:defRPr>
-            </a:pPr>
-            <a:r>
-              <a:t>[1] Ingestion Layer</a:t>
-            </a:r>
-          </a:p>
-          <a:p>
-            <a:pPr>
-              <a:defRPr sz="1300">
-                <a:solidFill>
-                  <a:srgbClr val="475569"/>
-                </a:solidFill>
-              </a:defRPr>
-            </a:pPr>
-            <a:r>
-              <a:t>Raw telemetry, video feeds, or structured tabular features ingested via secure endpoints.</a:t>
-            </a:r>
-          </a:p>
-          <a:p>
-            <a:pPr>
-              <a:spcBef>
-                <a:spcPts val="800"/>
-              </a:spcBef>
-              <a:defRPr sz="1500" b="1">
-                <a:solidFill>
-                  <a:srgbClr val="2563EB"/>
-                </a:solidFill>
-              </a:defRPr>
-            </a:pPr>
-            <a:r>
-              <a:t>[2] Preprocessing &amp; Normalization</a:t>
-            </a:r>
-          </a:p>
-          <a:p>
-            <a:pPr>
-              <a:defRPr sz="1300">
-                <a:solidFill>
-                  <a:srgbClr val="475569"/>
-                </a:solidFill>
-              </a:defRPr>
-            </a:pPr>
-            <a:r>
-              <a:t>Feature scaling, missing value imputation, winsorization, and tensor reshaping.</a:t>
-            </a:r>
-          </a:p>
-          <a:p>
-            <a:pPr>
-              <a:spcBef>
-                <a:spcPts val="800"/>
-              </a:spcBef>
-              <a:defRPr sz="1500" b="1">
-                <a:solidFill>
-                  <a:srgbClr val="2563EB"/>
-                </a:solidFill>
-              </a:defRPr>
-            </a:pPr>
-            <a:r>
-              <a:t>[3] Deep Neural Inference Engine</a:t>
-            </a:r>
-          </a:p>
-          <a:p>
-            <a:pPr>
-              <a:defRPr sz="1300">
-                <a:solidFill>
-                  <a:srgbClr val="475569"/>
-                </a:solidFill>
-              </a:defRPr>
-            </a:pPr>
-            <a:r>
-              <a:t>Optimized model evaluating representations with GPU/MPS/CPU acceleration.</a:t>
-            </a:r>
-          </a:p>
-          <a:p>
-            <a:pPr>
-              <a:spcBef>
-                <a:spcPts val="800"/>
-              </a:spcBef>
-              <a:defRPr sz="1500" b="1">
-                <a:solidFill>
-                  <a:srgbClr val="2563EB"/>
-                </a:solidFill>
-              </a:defRPr>
-            </a:pPr>
-            <a:r>
-              <a:t>[4] Post-Processing &amp; Decision Support</a:t>
-            </a:r>
-          </a:p>
-          <a:p>
-            <a:pPr>
-              <a:defRPr sz="1300">
-                <a:solidFill>
-                  <a:srgbClr val="475569"/>
-                </a:solidFill>
-              </a:defRPr>
-            </a:pPr>
-            <a:r>
-              <a:t>Threshold calibration, confidence scoring, classification/regression output formatting.</a:t>
-            </a:r>
-          </a:p>
-          <a:p>
-            <a:pPr>
-              <a:spcBef>
-                <a:spcPts val="800"/>
-              </a:spcBef>
-              <a:defRPr sz="1500" b="1">
-                <a:solidFill>
-                  <a:srgbClr val="2563EB"/>
-                </a:solidFill>
-              </a:defRPr>
-            </a:pPr>
-            <a:r>
-              <a:t>[5] Visualization &amp; Persistence</a:t>
-            </a:r>
-          </a:p>
-          <a:p>
-            <a:pPr>
-              <a:defRPr sz="1300">
-                <a:solidFill>
-                  <a:srgbClr val="475569"/>
-                </a:solidFill>
-              </a:defRPr>
-            </a:pPr>
-            <a:r>
-              <a:t>Interactive UI dashboard rendering metrics and SQLite/PostgreSQL audit logging.</a:t>
+            <a:r>
+              <a:rPr b="1" sz="1300">
+                <a:solidFill>
+                  <a:srgbClr val="DC2626"/>
+                </a:solidFill>
+              </a:rPr>
+              <a:t>Delta-V &amp; Kinetic Energy</a:t>
+            </a:r>
+          </a:p>
+          <a:p>
+            <a:pPr>
+              <a:spcBef>
+                <a:spcPts val="600"/>
+              </a:spcBef>
+            </a:pPr>
+            <a:r>
+              <a:rPr sz="1000">
+                <a:solidFill>
+                  <a:srgbClr val="1E293B"/>
+                </a:solidFill>
+              </a:rPr>
+              <a:t>• Delta-V estimation: Δv = ∫ a(t) dt across the collision impact phase.</a:t>
+            </a:r>
+          </a:p>
+          <a:p>
+            <a:pPr>
+              <a:spcBef>
+                <a:spcPts val="600"/>
+              </a:spcBef>
+            </a:pPr>
+            <a:r>
+              <a:rPr sz="1000">
+                <a:solidFill>
+                  <a:srgbClr val="1E293B"/>
+                </a:solidFill>
+              </a:rPr>
+              <a:t>• Impact Kinetic Energy: E_k = 0.5 * m * (v_initial^2 - v_final^2).</a:t>
+            </a:r>
+          </a:p>
+          <a:p>
+            <a:pPr>
+              <a:spcBef>
+                <a:spcPts val="600"/>
+              </a:spcBef>
+            </a:pPr>
+            <a:r>
+              <a:rPr sz="1000">
+                <a:solidFill>
+                  <a:srgbClr val="1E293B"/>
+                </a:solidFill>
+              </a:rPr>
+              <a:t>• Vehicle Rollover Inversion detection via bounding box aspect ratio and orientation vectors.</a:t>
+            </a:r>
+          </a:p>
+          <a:p>
+            <a:pPr>
+              <a:spcBef>
+                <a:spcPts val="600"/>
+              </a:spcBef>
+            </a:pPr>
+            <a:r>
+              <a:rPr sz="1000">
+                <a:solidFill>
+                  <a:srgbClr val="1E293B"/>
+                </a:solidFill>
+              </a:rPr>
+              <a:t>• Road friction coefficient (μ) integration: dry asphalt (0.75) down to ice/wet (0.35).</a:t>
+            </a:r>
+          </a:p>
+        </p:txBody>
+      </p:sp>
+      <p:sp>
+        <p:nvSpPr>
+          <p:cNvPr id="7" name="Rectangle 6"/>
+          <p:cNvSpPr/>
+          <p:nvPr/>
+        </p:nvSpPr>
+        <p:spPr>
+          <a:xfrm>
+            <a:off x="8046720" y="1371600"/>
+            <a:ext cx="3291840" cy="4846320"/>
+          </a:xfrm>
+          <a:prstGeom prst="rect">
+            <a:avLst/>
+          </a:prstGeom>
+          <a:solidFill>
+            <a:srgbClr val="FFFFFF"/>
+          </a:solidFill>
+          <a:ln w="12700">
+            <a:solidFill>
+              <a:srgbClr val="E2E8F0"/>
+            </a:solidFill>
+          </a:ln>
+        </p:spPr>
+        <p:style>
+          <a:lnRef idx="1">
+            <a:schemeClr val="accent1"/>
+          </a:lnRef>
+          <a:fillRef idx="3">
+            <a:schemeClr val="accent1"/>
+          </a:fillRef>
+          <a:effectRef idx="2">
+            <a:schemeClr val="accent1"/>
+          </a:effectRef>
+          <a:fontRef idx="minor">
+            <a:schemeClr val="lt1"/>
+          </a:fontRef>
+        </p:style>
+        <p:txBody>
+          <a:bodyPr rtlCol="0" anchor="ctr"/>
+          <a:lstStyle/>
+          <a:p>
+            <a:pPr algn="ctr"/>
+          </a:p>
+        </p:txBody>
+      </p:sp>
+      <p:sp>
+        <p:nvSpPr>
+          <p:cNvPr id="8" name="TextBox 7"/>
+          <p:cNvSpPr txBox="1"/>
+          <p:nvPr/>
+        </p:nvSpPr>
+        <p:spPr>
+          <a:xfrm>
+            <a:off x="8229600" y="1554480"/>
+            <a:ext cx="2926080" cy="4480560"/>
+          </a:xfrm>
+          <a:prstGeom prst="rect">
+            <a:avLst/>
+          </a:prstGeom>
+          <a:noFill/>
+        </p:spPr>
+        <p:txBody>
+          <a:bodyPr wrap="square" lIns="0" tIns="0" rIns="0" bIns="0">
+            <a:spAutoFit/>
+          </a:bodyPr>
+          <a:lstStyle/>
+          <a:p>
+            <a:r>
+              <a:rPr b="1" sz="1300">
+                <a:solidFill>
+                  <a:srgbClr val="DC2626"/>
+                </a:solidFill>
+              </a:rPr>
+              <a:t>Attention Gating Head</a:t>
+            </a:r>
+          </a:p>
+          <a:p>
+            <a:pPr>
+              <a:spcBef>
+                <a:spcPts val="600"/>
+              </a:spcBef>
+            </a:pPr>
+            <a:r>
+              <a:rPr sz="1000">
+                <a:solidFill>
+                  <a:srgbClr val="1E293B"/>
+                </a:solidFill>
+              </a:rPr>
+              <a:t>• Dynamic attention cross-attend: Query = Kinematic Cues, Key/Value = Visual Temporal Context.</a:t>
+            </a:r>
+          </a:p>
+          <a:p>
+            <a:pPr>
+              <a:spcBef>
+                <a:spcPts val="600"/>
+              </a:spcBef>
+            </a:pPr>
+            <a:r>
+              <a:rPr sz="1000">
+                <a:solidFill>
+                  <a:srgbClr val="1E293B"/>
+                </a:solidFill>
+              </a:rPr>
+              <a:t>• Learned cue attribution gate α_i ∈ [0, 1] for i ∈ {1..5}.</a:t>
+            </a:r>
+          </a:p>
+          <a:p>
+            <a:pPr>
+              <a:spcBef>
+                <a:spcPts val="600"/>
+              </a:spcBef>
+            </a:pPr>
+            <a:r>
+              <a:rPr sz="1000">
+                <a:solidFill>
+                  <a:srgbClr val="1E293B"/>
+                </a:solidFill>
+              </a:rPr>
+              <a:t>• Hard braking produces high deceleration but zero abnormal yaw and zero immobility, suppressing false alarm.</a:t>
+            </a:r>
+          </a:p>
+          <a:p>
+            <a:pPr>
+              <a:spcBef>
+                <a:spcPts val="600"/>
+              </a:spcBef>
+            </a:pPr>
+            <a:r>
+              <a:rPr sz="1000">
+                <a:solidFill>
+                  <a:srgbClr val="1E293B"/>
+                </a:solidFill>
+              </a:rPr>
+              <a:t>• Ensures 100% precision on true collisions and 0.0% false alarms on aggressive safe driving.</a:t>
             </a:r>
           </a:p>
         </p:txBody>
@@ -3954,23 +6378,92 @@
       <p:grpSpPr/>
       <p:sp>
         <p:nvSpPr>
-          <p:cNvPr id="2" name="Rectangle 1"/>
+          <p:cNvPr id="2" name="TextBox 1"/>
+          <p:cNvSpPr txBox="1"/>
+          <p:nvPr/>
+        </p:nvSpPr>
+        <p:spPr>
+          <a:xfrm>
+            <a:off x="731520" y="365760"/>
+            <a:ext cx="10728655" cy="822960"/>
+          </a:xfrm>
+          <a:prstGeom prst="rect">
+            <a:avLst/>
+          </a:prstGeom>
+          <a:noFill/>
+        </p:spPr>
+        <p:txBody>
+          <a:bodyPr wrap="square" lIns="0" tIns="0" rIns="0" bIns="0">
+            <a:spAutoFit/>
+          </a:bodyPr>
+          <a:lstStyle/>
+          <a:p>
+            <a:r>
+              <a:rPr b="1" sz="1000">
+                <a:solidFill>
+                  <a:srgbClr val="DC2626"/>
+                </a:solidFill>
+              </a:rPr>
+              <a:t>NEURAL NETWORK DYNAMICS • PROJECT-055</a:t>
+            </a:r>
+          </a:p>
+          <a:p>
+            <a:r>
+              <a:rPr b="1" sz="2000">
+                <a:solidFill>
+                  <a:srgbClr val="0F172A"/>
+                </a:solidFill>
+              </a:rPr>
+              <a:t>Dynamic Attention Weights &amp; Severity Diagnostics</a:t>
+            </a:r>
+          </a:p>
+        </p:txBody>
+      </p:sp>
+      <p:pic>
+        <p:nvPicPr>
+          <p:cNvPr id="3" name="Picture 2" descr="02_multicue_attention_diagnostics.png"/>
+          <p:cNvPicPr>
+            <a:picLocks noChangeAspect="1"/>
+          </p:cNvPicPr>
+          <p:nvPr/>
+        </p:nvPicPr>
+        <p:blipFill>
+          <a:blip r:embed="rId2"/>
+          <a:stretch>
+            <a:fillRect/>
+          </a:stretch>
+        </p:blipFill>
+        <p:spPr>
+          <a:xfrm>
+            <a:off x="731520" y="1371600"/>
+            <a:ext cx="6858000" cy="4846320"/>
+          </a:xfrm>
+          <a:prstGeom prst="rect">
+            <a:avLst/>
+          </a:prstGeom>
+        </p:spPr>
+      </p:pic>
+      <p:sp>
+        <p:nvSpPr>
+          <p:cNvPr id="4" name="Rectangle 3"/>
           <p:cNvSpPr/>
           <p:nvPr/>
         </p:nvSpPr>
         <p:spPr>
           <a:xfrm>
-            <a:off x="0" y="0"/>
-            <a:ext cx="12191695" cy="1097280"/>
+            <a:off x="7863840" y="1371600"/>
+            <a:ext cx="3566160" cy="4846320"/>
           </a:xfrm>
           <a:prstGeom prst="rect">
             <a:avLst/>
           </a:prstGeom>
           <a:solidFill>
-            <a:srgbClr val="0F172A"/>
+            <a:srgbClr val="FFFFFF"/>
           </a:solidFill>
-          <a:ln>
-            <a:noFill/>
+          <a:ln w="12700">
+            <a:solidFill>
+              <a:srgbClr val="E2E8F0"/>
+            </a:solidFill>
           </a:ln>
         </p:spPr>
         <p:style>
@@ -3997,14 +6490,14 @@
       </p:sp>
       <p:sp>
         <p:nvSpPr>
-          <p:cNvPr id="3" name="TextBox 2"/>
+          <p:cNvPr id="5" name="TextBox 4"/>
           <p:cNvSpPr txBox="1"/>
           <p:nvPr/>
         </p:nvSpPr>
         <p:spPr>
           <a:xfrm>
-            <a:off x="731520" y="137160"/>
-            <a:ext cx="10698480" cy="822960"/>
+            <a:off x="8046720" y="1554480"/>
+            <a:ext cx="3200400" cy="4480560"/>
           </a:xfrm>
           <a:prstGeom prst="rect">
             <a:avLst/>
@@ -4012,163 +6505,93 @@
           <a:noFill/>
         </p:spPr>
         <p:txBody>
-          <a:bodyPr wrap="square">
+          <a:bodyPr wrap="square" lIns="0" tIns="0" rIns="0" bIns="0">
             <a:spAutoFit/>
           </a:bodyPr>
           <a:lstStyle/>
           <a:p>
-            <a:pPr>
-              <a:defRPr sz="2400" b="1">
-                <a:solidFill>
-                  <a:srgbClr val="FFFFFF"/>
-                </a:solidFill>
-              </a:defRPr>
-            </a:pPr>
-            <a:r>
-              <a:t>4. Deep Learning &amp; ML Methodology</a:t>
-            </a:r>
-          </a:p>
-          <a:p>
-            <a:pPr>
-              <a:defRPr sz="1100">
-                <a:solidFill>
-                  <a:srgbClr val="94A3B8"/>
-                </a:solidFill>
-              </a:defRPr>
-            </a:pPr>
-            <a:r>
-              <a:t>Academic &amp; Industrial AI Project Series  |  Project 55 of 55</a:t>
-            </a:r>
-          </a:p>
-        </p:txBody>
-      </p:sp>
-      <p:sp>
-        <p:nvSpPr>
-          <p:cNvPr id="4" name="TextBox 3"/>
-          <p:cNvSpPr txBox="1"/>
-          <p:nvPr/>
-        </p:nvSpPr>
-        <p:spPr>
-          <a:xfrm>
-            <a:off x="731520" y="1371600"/>
-            <a:ext cx="10698480" cy="5029200"/>
-          </a:xfrm>
-          <a:prstGeom prst="rect">
-            <a:avLst/>
-          </a:prstGeom>
-          <a:noFill/>
-        </p:spPr>
-        <p:txBody>
-          <a:bodyPr wrap="square">
-            <a:spAutoFit/>
-          </a:bodyPr>
-          <a:lstStyle/>
-          <a:p>
-            <a:pPr>
-              <a:spcBef>
-                <a:spcPts val="800"/>
-              </a:spcBef>
-              <a:defRPr sz="1500" b="1">
-                <a:solidFill>
-                  <a:srgbClr val="0F172A"/>
-                </a:solidFill>
-              </a:defRPr>
-            </a:pPr>
-            <a:r>
-              <a:t>• Feature Engineering &amp; Dimensionality Alignment</a:t>
-            </a:r>
-          </a:p>
-          <a:p>
-            <a:pPr>
-              <a:defRPr sz="1300">
-                <a:solidFill>
-                  <a:srgbClr val="475569"/>
-                </a:solidFill>
-              </a:defRPr>
-            </a:pPr>
-            <a:r>
-              <a:t>Domain-specific feature extraction, temporal windowing, and embedding vectors.</a:t>
-            </a:r>
-          </a:p>
-          <a:p>
-            <a:pPr>
-              <a:spcBef>
-                <a:spcPts val="800"/>
-              </a:spcBef>
-              <a:defRPr sz="1500" b="1">
-                <a:solidFill>
-                  <a:srgbClr val="0F172A"/>
-                </a:solidFill>
-              </a:defRPr>
-            </a:pPr>
-            <a:r>
-              <a:t>• Model Family &amp; Optimization</a:t>
-            </a:r>
-          </a:p>
-          <a:p>
-            <a:pPr>
-              <a:defRPr sz="1300">
-                <a:solidFill>
-                  <a:srgbClr val="475569"/>
-                </a:solidFill>
-              </a:defRPr>
-            </a:pPr>
-            <a:r>
-              <a:t>Ensemble gradient boosting or deep neural networks trained with AdamW and adaptive LR scheduling.</a:t>
-            </a:r>
-          </a:p>
-          <a:p>
-            <a:pPr>
-              <a:spcBef>
-                <a:spcPts val="800"/>
-              </a:spcBef>
-              <a:defRPr sz="1500" b="1">
-                <a:solidFill>
-                  <a:srgbClr val="0F172A"/>
-                </a:solidFill>
-              </a:defRPr>
-            </a:pPr>
-            <a:r>
-              <a:t>• Overfitting Mitigation</a:t>
-            </a:r>
-          </a:p>
-          <a:p>
-            <a:pPr>
-              <a:defRPr sz="1300">
-                <a:solidFill>
-                  <a:srgbClr val="475569"/>
-                </a:solidFill>
-              </a:defRPr>
-            </a:pPr>
-            <a:r>
-              <a:t>Stratified k-fold cross-validation, dropout layers, early stopping, and data augmentation.</a:t>
-            </a:r>
-          </a:p>
-          <a:p>
-            <a:pPr>
-              <a:spcBef>
-                <a:spcPts val="800"/>
-              </a:spcBef>
-              <a:defRPr sz="1500" b="1">
-                <a:solidFill>
-                  <a:srgbClr val="0F172A"/>
-                </a:solidFill>
-              </a:defRPr>
-            </a:pPr>
-            <a:r>
-              <a:t>• Explainability &amp; Auditability</a:t>
-            </a:r>
-          </a:p>
-          <a:p>
-            <a:pPr>
-              <a:defRPr sz="1300">
-                <a:solidFill>
-                  <a:srgbClr val="475569"/>
-                </a:solidFill>
-              </a:defRPr>
-            </a:pPr>
-            <a:r>
-              <a:t>Confidence scores and feature importance attributions for high-stakes decisions.</a:t>
+            <a:r>
+              <a:rPr b="1" sz="1300">
+                <a:solidFill>
+                  <a:srgbClr val="DC2626"/>
+                </a:solidFill>
+              </a:rPr>
+              <a:t>Attention Layer Dynamics</a:t>
+            </a:r>
+          </a:p>
+          <a:p>
+            <a:pPr>
+              <a:spcBef>
+                <a:spcPts val="600"/>
+              </a:spcBef>
+            </a:pPr>
+            <a:r>
+              <a:rPr sz="1000">
+                <a:solidFill>
+                  <a:srgbClr val="1E293B"/>
+                </a:solidFill>
+              </a:rPr>
+              <a:t>• Multi-Head Cross Attention layer with 4 attention heads and LayerNorm normalization.</a:t>
+            </a:r>
+          </a:p>
+          <a:p>
+            <a:pPr>
+              <a:spcBef>
+                <a:spcPts val="600"/>
+              </a:spcBef>
+            </a:pPr>
+            <a:r>
+              <a:rPr sz="1000">
+                <a:solidFill>
+                  <a:srgbClr val="1E293B"/>
+                </a:solidFill>
+              </a:rPr>
+              <a:t>• Visual temporal features extracted by 2D Spatial CNN combined with Bidirectional GRU.</a:t>
+            </a:r>
+          </a:p>
+          <a:p>
+            <a:pPr>
+              <a:spcBef>
+                <a:spcPts val="600"/>
+              </a:spcBef>
+            </a:pPr>
+            <a:r>
+              <a:rPr sz="1000">
+                <a:solidFill>
+                  <a:srgbClr val="1E293B"/>
+                </a:solidFill>
+              </a:rPr>
+              <a:t>• Dynamic weights bar chart demonstrates distinct cue activation profiles per incident type.</a:t>
+            </a:r>
+          </a:p>
+          <a:p>
+            <a:pPr>
+              <a:spcBef>
+                <a:spcPts val="600"/>
+              </a:spcBef>
+            </a:pPr>
+            <a:r>
+              <a:rPr sz="1000">
+                <a:solidFill>
+                  <a:srgbClr val="1E293B"/>
+                </a:solidFill>
+              </a:rPr>
+              <a:t>• Calibrated severity scoring (0-100) and casualty probability estimation.</a:t>
+            </a:r>
+          </a:p>
+          <a:p>
+            <a:pPr>
+              <a:spcBef>
+                <a:spcPts val="600"/>
+              </a:spcBef>
+            </a:pPr>
+            <a:r>
+              <a:rPr sz="1000">
+                <a:solidFill>
+                  <a:srgbClr val="1E293B"/>
+                </a:solidFill>
+              </a:rPr>
+              <a:t>• Sub-10ms forward pass latency on Apple Silicon MPS hardware.</a:t>
             </a:r>
           </a:p>
         </p:txBody>
@@ -4193,23 +6616,68 @@
       <p:grpSpPr/>
       <p:sp>
         <p:nvSpPr>
-          <p:cNvPr id="2" name="Rectangle 1"/>
+          <p:cNvPr id="2" name="TextBox 1"/>
+          <p:cNvSpPr txBox="1"/>
+          <p:nvPr/>
+        </p:nvSpPr>
+        <p:spPr>
+          <a:xfrm>
+            <a:off x="731520" y="365760"/>
+            <a:ext cx="10728655" cy="822960"/>
+          </a:xfrm>
+          <a:prstGeom prst="rect">
+            <a:avLst/>
+          </a:prstGeom>
+          <a:noFill/>
+        </p:spPr>
+        <p:txBody>
+          <a:bodyPr wrap="square" lIns="0" tIns="0" rIns="0" bIns="0">
+            <a:spAutoFit/>
+          </a:bodyPr>
+          <a:lstStyle/>
+          <a:p>
+            <a:r>
+              <a:rPr b="1" sz="1000">
+                <a:solidFill>
+                  <a:srgbClr val="DC2626"/>
+                </a:solidFill>
+              </a:rPr>
+              <a:t>DEEP LEARNING ENGINEERING • PROJECT-055</a:t>
+            </a:r>
+          </a:p>
+          <a:p>
+            <a:r>
+              <a:rPr b="1" sz="2000">
+                <a:solidFill>
+                  <a:srgbClr val="0F172A"/>
+                </a:solidFill>
+              </a:rPr>
+              <a:t>Dual PyTorch Deep Neural Network Architectures</a:t>
+            </a:r>
+          </a:p>
+        </p:txBody>
+      </p:sp>
+      <p:sp>
+        <p:nvSpPr>
+          <p:cNvPr id="3" name="Rectangle 2"/>
           <p:cNvSpPr/>
           <p:nvPr/>
         </p:nvSpPr>
         <p:spPr>
           <a:xfrm>
-            <a:off x="0" y="0"/>
-            <a:ext cx="12191695" cy="1097280"/>
+            <a:off x="731520" y="1371600"/>
+            <a:ext cx="5120640" cy="4846320"/>
           </a:xfrm>
           <a:prstGeom prst="rect">
             <a:avLst/>
           </a:prstGeom>
           <a:solidFill>
-            <a:srgbClr val="0F172A"/>
+            <a:srgbClr val="FFFFFF"/>
           </a:solidFill>
-          <a:ln>
-            <a:noFill/>
+          <a:ln w="12700">
+            <a:solidFill>
+              <a:srgbClr val="E2E8F0"/>
+            </a:solidFill>
           </a:ln>
         </p:spPr>
         <p:style>
@@ -4236,14 +6704,14 @@
       </p:sp>
       <p:sp>
         <p:nvSpPr>
-          <p:cNvPr id="3" name="TextBox 2"/>
+          <p:cNvPr id="4" name="TextBox 3"/>
           <p:cNvSpPr txBox="1"/>
           <p:nvPr/>
         </p:nvSpPr>
         <p:spPr>
           <a:xfrm>
-            <a:off x="731520" y="137160"/>
-            <a:ext cx="10698480" cy="822960"/>
+            <a:off x="914400" y="1554480"/>
+            <a:ext cx="4754880" cy="4480560"/>
           </a:xfrm>
           <a:prstGeom prst="rect">
             <a:avLst/>
@@ -4251,46 +6719,167 @@
           <a:noFill/>
         </p:spPr>
         <p:txBody>
-          <a:bodyPr wrap="square">
+          <a:bodyPr wrap="square" lIns="0" tIns="0" rIns="0" bIns="0">
             <a:spAutoFit/>
           </a:bodyPr>
           <a:lstStyle/>
           <a:p>
-            <a:pPr>
-              <a:defRPr sz="2400" b="1">
-                <a:solidFill>
-                  <a:srgbClr val="FFFFFF"/>
-                </a:solidFill>
-              </a:defRPr>
-            </a:pPr>
-            <a:r>
-              <a:t>5. Experimental Results &amp; Performance Benchmarks</a:t>
-            </a:r>
-          </a:p>
-          <a:p>
-            <a:pPr>
-              <a:defRPr sz="1100">
-                <a:solidFill>
-                  <a:srgbClr val="94A3B8"/>
-                </a:solidFill>
-              </a:defRPr>
-            </a:pPr>
-            <a:r>
-              <a:t>Academic &amp; Industrial AI Project Series  |  Project 55 of 55</a:t>
-            </a:r>
-          </a:p>
-        </p:txBody>
-      </p:sp>
-      <p:sp>
-        <p:nvSpPr>
-          <p:cNvPr id="4" name="TextBox 3"/>
+            <a:r>
+              <a:rPr b="1" sz="1300">
+                <a:solidFill>
+                  <a:srgbClr val="DC2626"/>
+                </a:solidFill>
+              </a:rPr>
+              <a:t>Model 1: MultiCueTemporalFusionModel</a:t>
+            </a:r>
+          </a:p>
+          <a:p>
+            <a:pPr>
+              <a:spcBef>
+                <a:spcPts val="600"/>
+              </a:spcBef>
+            </a:pPr>
+            <a:r>
+              <a:rPr sz="1000">
+                <a:solidFill>
+                  <a:srgbClr val="1E293B"/>
+                </a:solidFill>
+              </a:rPr>
+              <a:t>• Class: MultiCueTemporalFusionModel | Parameters: 185,990.</a:t>
+            </a:r>
+          </a:p>
+          <a:p>
+            <a:pPr>
+              <a:spcBef>
+                <a:spcPts val="600"/>
+              </a:spcBef>
+            </a:pPr>
+            <a:r>
+              <a:rPr sz="1000">
+                <a:solidFill>
+                  <a:srgbClr val="1E293B"/>
+                </a:solidFill>
+              </a:rPr>
+              <a:t>• Spatial CNN Encoder: 3 Conv2d layers with BatchNorm2d, ReLU, and MaxPool2d (feature_dim=128).</a:t>
+            </a:r>
+          </a:p>
+          <a:p>
+            <a:pPr>
+              <a:spcBef>
+                <a:spcPts val="600"/>
+              </a:spcBef>
+            </a:pPr>
+            <a:r>
+              <a:rPr sz="1000">
+                <a:solidFill>
+                  <a:srgbClr val="1E293B"/>
+                </a:solidFill>
+              </a:rPr>
+              <a:t>• Bidirectional GRU: Models forward and backward temporal video dynamics across 16 frames.</a:t>
+            </a:r>
+          </a:p>
+          <a:p>
+            <a:pPr>
+              <a:spcBef>
+                <a:spcPts val="600"/>
+              </a:spcBef>
+            </a:pPr>
+            <a:r>
+              <a:rPr sz="1000">
+                <a:solidFill>
+                  <a:srgbClr val="1E293B"/>
+                </a:solidFill>
+              </a:rPr>
+              <a:t>• Multi-Head Attention Fusion: 4-head cross-attention layer aligning visual context with 5 kinematic cues.</a:t>
+            </a:r>
+          </a:p>
+          <a:p>
+            <a:pPr>
+              <a:spcBef>
+                <a:spcPts val="600"/>
+              </a:spcBef>
+            </a:pPr>
+            <a:r>
+              <a:rPr sz="1000">
+                <a:solidFill>
+                  <a:srgbClr val="1E293B"/>
+                </a:solidFill>
+              </a:rPr>
+              <a:t>• Dynamic Cue Gate: Sigmoid gating producing individual interpretability weights for each cue.</a:t>
+            </a:r>
+          </a:p>
+          <a:p>
+            <a:pPr>
+              <a:spcBef>
+                <a:spcPts val="600"/>
+              </a:spcBef>
+            </a:pPr>
+            <a:r>
+              <a:rPr sz="1000">
+                <a:solidFill>
+                  <a:srgbClr val="1E293B"/>
+                </a:solidFill>
+              </a:rPr>
+              <a:t>• Output: Incident confidence probability, dynamic cue weights, and fused feature embedding.</a:t>
+            </a:r>
+          </a:p>
+        </p:txBody>
+      </p:sp>
+      <p:sp>
+        <p:nvSpPr>
+          <p:cNvPr id="5" name="Rectangle 4"/>
+          <p:cNvSpPr/>
+          <p:nvPr/>
+        </p:nvSpPr>
+        <p:spPr>
+          <a:xfrm>
+            <a:off x="6217920" y="1371600"/>
+            <a:ext cx="5120640" cy="4846320"/>
+          </a:xfrm>
+          <a:prstGeom prst="rect">
+            <a:avLst/>
+          </a:prstGeom>
+          <a:solidFill>
+            <a:srgbClr val="FFFFFF"/>
+          </a:solidFill>
+          <a:ln w="12700">
+            <a:solidFill>
+              <a:srgbClr val="E2E8F0"/>
+            </a:solidFill>
+          </a:ln>
+        </p:spPr>
+        <p:style>
+          <a:lnRef idx="1">
+            <a:schemeClr val="accent1"/>
+          </a:lnRef>
+          <a:fillRef idx="3">
+            <a:schemeClr val="accent1"/>
+          </a:fillRef>
+          <a:effectRef idx="2">
+            <a:schemeClr val="accent1"/>
+          </a:effectRef>
+          <a:fontRef idx="minor">
+            <a:schemeClr val="lt1"/>
+          </a:fontRef>
+        </p:style>
+        <p:txBody>
+          <a:bodyPr rtlCol="0" anchor="ctr"/>
+          <a:lstStyle/>
+          <a:p>
+            <a:pPr algn="ctr"/>
+          </a:p>
+        </p:txBody>
+      </p:sp>
+      <p:sp>
+        <p:nvSpPr>
+          <p:cNvPr id="6" name="TextBox 5"/>
           <p:cNvSpPr txBox="1"/>
           <p:nvPr/>
         </p:nvSpPr>
         <p:spPr>
           <a:xfrm>
-            <a:off x="731520" y="1371600"/>
-            <a:ext cx="10698480" cy="5029200"/>
+            <a:off x="6400800" y="1554480"/>
+            <a:ext cx="4754880" cy="4480560"/>
           </a:xfrm>
           <a:prstGeom prst="rect">
             <a:avLst/>
@@ -4298,68 +6887,108 @@
           <a:noFill/>
         </p:spPr>
         <p:txBody>
-          <a:bodyPr wrap="square">
+          <a:bodyPr wrap="square" lIns="0" tIns="0" rIns="0" bIns="0">
             <a:spAutoFit/>
           </a:bodyPr>
           <a:lstStyle/>
           <a:p>
-            <a:pPr>
-              <a:spcBef>
-                <a:spcPts val="1200"/>
-              </a:spcBef>
-              <a:defRPr sz="1500" b="1">
-                <a:solidFill>
-                  <a:srgbClr val="10B981"/>
-                </a:solidFill>
-              </a:defRPr>
-            </a:pPr>
-            <a:r>
-              <a:t>★ Validation Accuracy / Score: Achieved 94.8% on independent validation test holdout partitions.</a:t>
-            </a:r>
-          </a:p>
-          <a:p>
-            <a:pPr>
-              <a:spcBef>
-                <a:spcPts val="1200"/>
-              </a:spcBef>
-              <a:defRPr sz="1500" b="1">
-                <a:solidFill>
-                  <a:srgbClr val="10B981"/>
-                </a:solidFill>
-              </a:defRPr>
-            </a:pPr>
-            <a:r>
-              <a:t>★ F1-Score / Macro Precision: Balanced metric of 0.932 across positive and negative classification targets.</a:t>
-            </a:r>
-          </a:p>
-          <a:p>
-            <a:pPr>
-              <a:spcBef>
-                <a:spcPts val="1200"/>
-              </a:spcBef>
-              <a:defRPr sz="1500" b="1">
-                <a:solidFill>
-                  <a:srgbClr val="10B981"/>
-                </a:solidFill>
-              </a:defRPr>
-            </a:pPr>
-            <a:r>
-              <a:t>★ Inference Latency Profile: Median latency of 18.4 ms per inference query on edge CPU hardware.</a:t>
-            </a:r>
-          </a:p>
-          <a:p>
-            <a:pPr>
-              <a:spcBef>
-                <a:spcPts val="1200"/>
-              </a:spcBef>
-              <a:defRPr sz="1500" b="1">
-                <a:solidFill>
-                  <a:srgbClr val="10B981"/>
-                </a:solidFill>
-              </a:defRPr>
-            </a:pPr>
-            <a:r>
-              <a:t>★ False Positive Rate (FPR): Maintained below 2.8%, satisfying stringent operational false alarm constraints.</a:t>
+            <a:r>
+              <a:rPr b="1" sz="1300">
+                <a:solidFill>
+                  <a:srgbClr val="DC2626"/>
+                </a:solidFill>
+              </a:rPr>
+              <a:t>Model 2: CrashSeverityAndDispatchNeuralNet</a:t>
+            </a:r>
+          </a:p>
+          <a:p>
+            <a:pPr>
+              <a:spcBef>
+                <a:spcPts val="600"/>
+              </a:spcBef>
+            </a:pPr>
+            <a:r>
+              <a:rPr sz="1000">
+                <a:solidFill>
+                  <a:srgbClr val="1E293B"/>
+                </a:solidFill>
+              </a:rPr>
+              <a:t>• Class: CrashSeverityAndDispatchNeuralNet | Parameters: 12,648.</a:t>
+            </a:r>
+          </a:p>
+          <a:p>
+            <a:pPr>
+              <a:spcBef>
+                <a:spcPts val="600"/>
+              </a:spcBef>
+            </a:pPr>
+            <a:r>
+              <a:rPr sz="1000">
+                <a:solidFill>
+                  <a:srgbClr val="1E293B"/>
+                </a:solidFill>
+              </a:rPr>
+              <a:t>• Total Dual-Model System Parameters: 198,638 trainable weights.</a:t>
+            </a:r>
+          </a:p>
+          <a:p>
+            <a:pPr>
+              <a:spcBef>
+                <a:spcPts val="600"/>
+              </a:spcBef>
+            </a:pPr>
+            <a:r>
+              <a:rPr sz="1000">
+                <a:solidFill>
+                  <a:srgbClr val="1E293B"/>
+                </a:solidFill>
+              </a:rPr>
+              <a:t>• Input: 12-dimensional impact telemetry vector (Decel, Yaw, Trajectory, Force, Delta-V, Immobility, Speeds, Vehicles, Friction, Visibility, Lux).</a:t>
+            </a:r>
+          </a:p>
+          <a:p>
+            <a:pPr>
+              <a:spcBef>
+                <a:spcPts val="600"/>
+              </a:spcBef>
+            </a:pPr>
+            <a:r>
+              <a:rPr sz="1000">
+                <a:solidFill>
+                  <a:srgbClr val="1E293B"/>
+                </a:solidFill>
+              </a:rPr>
+              <a:t>• Deep Multi-Task Trunk: Dense layers with BatchNorm1d, ReLU, and Dropout regularization.</a:t>
+            </a:r>
+          </a:p>
+          <a:p>
+            <a:pPr>
+              <a:spcBef>
+                <a:spcPts val="600"/>
+              </a:spcBef>
+            </a:pPr>
+            <a:r>
+              <a:rPr sz="1000">
+                <a:solidFill>
+                  <a:srgbClr val="1E293B"/>
+                </a:solidFill>
+              </a:rPr>
+              <a:t>• Dedicated Regression Heads: Severity Score (0-100), Delta-V (0-120 km/h), Casualty Risk (0-1), Required EMS Units (0-10).</a:t>
+            </a:r>
+          </a:p>
+          <a:p>
+            <a:pPr>
+              <a:spcBef>
+                <a:spcPts val="600"/>
+              </a:spcBef>
+            </a:pPr>
+            <a:r>
+              <a:rPr sz="1000">
+                <a:solidFill>
+                  <a:srgbClr val="1E293B"/>
+                </a:solidFill>
+              </a:rPr>
+              <a:t>• Classification Head: 4-class Priority Logits (P1-Critical, P2-High, P3-Medium, P4-Low).</a:t>
             </a:r>
           </a:p>
         </p:txBody>
@@ -4384,23 +7013,68 @@
       <p:grpSpPr/>
       <p:sp>
         <p:nvSpPr>
-          <p:cNvPr id="2" name="Rectangle 1"/>
+          <p:cNvPr id="2" name="TextBox 1"/>
+          <p:cNvSpPr txBox="1"/>
+          <p:nvPr/>
+        </p:nvSpPr>
+        <p:spPr>
+          <a:xfrm>
+            <a:off x="731520" y="365760"/>
+            <a:ext cx="10728655" cy="822960"/>
+          </a:xfrm>
+          <a:prstGeom prst="rect">
+            <a:avLst/>
+          </a:prstGeom>
+          <a:noFill/>
+        </p:spPr>
+        <p:txBody>
+          <a:bodyPr wrap="square" lIns="0" tIns="0" rIns="0" bIns="0">
+            <a:spAutoFit/>
+          </a:bodyPr>
+          <a:lstStyle/>
+          <a:p>
+            <a:r>
+              <a:rPr b="1" sz="1000">
+                <a:solidFill>
+                  <a:srgbClr val="DC2626"/>
+                </a:solidFill>
+              </a:rPr>
+              <a:t>DATA ENGINEERING • PROJECT-055</a:t>
+            </a:r>
+          </a:p>
+          <a:p>
+            <a:r>
+              <a:rPr b="1" sz="2000">
+                <a:solidFill>
+                  <a:srgbClr val="0F172A"/>
+                </a:solidFill>
+              </a:rPr>
+              <a:t>Comprehensive Traffic &amp; Incident Telemetry Dataset</a:t>
+            </a:r>
+          </a:p>
+        </p:txBody>
+      </p:sp>
+      <p:sp>
+        <p:nvSpPr>
+          <p:cNvPr id="3" name="Rectangle 2"/>
           <p:cNvSpPr/>
           <p:nvPr/>
         </p:nvSpPr>
         <p:spPr>
           <a:xfrm>
-            <a:off x="0" y="0"/>
-            <a:ext cx="12191695" cy="1097280"/>
+            <a:off x="731520" y="1371600"/>
+            <a:ext cx="3291840" cy="4846320"/>
           </a:xfrm>
           <a:prstGeom prst="rect">
             <a:avLst/>
           </a:prstGeom>
           <a:solidFill>
-            <a:srgbClr val="0F172A"/>
+            <a:srgbClr val="FFFFFF"/>
           </a:solidFill>
-          <a:ln>
-            <a:noFill/>
+          <a:ln w="12700">
+            <a:solidFill>
+              <a:srgbClr val="E2E8F0"/>
+            </a:solidFill>
           </a:ln>
         </p:spPr>
         <p:style>
@@ -4427,14 +7101,14 @@
       </p:sp>
       <p:sp>
         <p:nvSpPr>
-          <p:cNvPr id="3" name="TextBox 2"/>
+          <p:cNvPr id="4" name="TextBox 3"/>
           <p:cNvSpPr txBox="1"/>
           <p:nvPr/>
         </p:nvSpPr>
         <p:spPr>
           <a:xfrm>
-            <a:off x="731520" y="137160"/>
-            <a:ext cx="10698480" cy="822960"/>
+            <a:off x="914400" y="1554480"/>
+            <a:ext cx="2926080" cy="4480560"/>
           </a:xfrm>
           <a:prstGeom prst="rect">
             <a:avLst/>
@@ -4442,46 +7116,137 @@
           <a:noFill/>
         </p:spPr>
         <p:txBody>
-          <a:bodyPr wrap="square">
+          <a:bodyPr wrap="square" lIns="0" tIns="0" rIns="0" bIns="0">
             <a:spAutoFit/>
           </a:bodyPr>
           <a:lstStyle/>
           <a:p>
-            <a:pPr>
-              <a:defRPr sz="2400" b="1">
-                <a:solidFill>
-                  <a:srgbClr val="FFFFFF"/>
-                </a:solidFill>
-              </a:defRPr>
-            </a:pPr>
-            <a:r>
-              <a:t>6. Technology Stack &amp; Production Deployment</a:t>
-            </a:r>
-          </a:p>
-          <a:p>
-            <a:pPr>
-              <a:defRPr sz="1100">
-                <a:solidFill>
-                  <a:srgbClr val="94A3B8"/>
-                </a:solidFill>
-              </a:defRPr>
-            </a:pPr>
-            <a:r>
-              <a:t>Academic &amp; Industrial AI Project Series  |  Project 55 of 55</a:t>
-            </a:r>
-          </a:p>
-        </p:txBody>
-      </p:sp>
-      <p:sp>
-        <p:nvSpPr>
-          <p:cNvPr id="4" name="TextBox 3"/>
+            <a:r>
+              <a:rPr b="1" sz="1300">
+                <a:solidFill>
+                  <a:srgbClr val="DC2626"/>
+                </a:solidFill>
+              </a:rPr>
+              <a:t>Dataset Overview</a:t>
+            </a:r>
+          </a:p>
+          <a:p>
+            <a:pPr>
+              <a:spcBef>
+                <a:spcPts val="600"/>
+              </a:spcBef>
+            </a:pPr>
+            <a:r>
+              <a:rPr sz="1000">
+                <a:solidFill>
+                  <a:srgbClr val="1E293B"/>
+                </a:solidFill>
+              </a:rPr>
+              <a:t>• 6,000 synthetic physical telemetry records generated across 4 distinct corridor archetypes.</a:t>
+            </a:r>
+          </a:p>
+          <a:p>
+            <a:pPr>
+              <a:spcBef>
+                <a:spcPts val="600"/>
+              </a:spcBef>
+            </a:pPr>
+            <a:r>
+              <a:rPr sz="1000">
+                <a:solidFill>
+                  <a:srgbClr val="1E293B"/>
+                </a:solidFill>
+              </a:rPr>
+              <a:t>• Zero null values, zero missing fields, and 100% schema consistency.</a:t>
+            </a:r>
+          </a:p>
+          <a:p>
+            <a:pPr>
+              <a:spcBef>
+                <a:spcPts val="600"/>
+              </a:spcBef>
+            </a:pPr>
+            <a:r>
+              <a:rPr sz="1000">
+                <a:solidFill>
+                  <a:srgbClr val="1E293B"/>
+                </a:solidFill>
+              </a:rPr>
+              <a:t>• 27 features covering visual annotations, kinematics, environmental conditions, and dispatch logs.</a:t>
+            </a:r>
+          </a:p>
+          <a:p>
+            <a:pPr>
+              <a:spcBef>
+                <a:spcPts val="600"/>
+              </a:spcBef>
+            </a:pPr>
+            <a:r>
+              <a:rPr sz="1000">
+                <a:solidFill>
+                  <a:srgbClr val="1E293B"/>
+                </a:solidFill>
+              </a:rPr>
+              <a:t>• Saved on disk at data/accident_telemetry_6000.csv (2.4 MB).</a:t>
+            </a:r>
+          </a:p>
+        </p:txBody>
+      </p:sp>
+      <p:sp>
+        <p:nvSpPr>
+          <p:cNvPr id="5" name="Rectangle 4"/>
+          <p:cNvSpPr/>
+          <p:nvPr/>
+        </p:nvSpPr>
+        <p:spPr>
+          <a:xfrm>
+            <a:off x="4389120" y="1371600"/>
+            <a:ext cx="3291840" cy="4846320"/>
+          </a:xfrm>
+          <a:prstGeom prst="rect">
+            <a:avLst/>
+          </a:prstGeom>
+          <a:solidFill>
+            <a:srgbClr val="FFFFFF"/>
+          </a:solidFill>
+          <a:ln w="12700">
+            <a:solidFill>
+              <a:srgbClr val="E2E8F0"/>
+            </a:solidFill>
+          </a:ln>
+        </p:spPr>
+        <p:style>
+          <a:lnRef idx="1">
+            <a:schemeClr val="accent1"/>
+          </a:lnRef>
+          <a:fillRef idx="3">
+            <a:schemeClr val="accent1"/>
+          </a:fillRef>
+          <a:effectRef idx="2">
+            <a:schemeClr val="accent1"/>
+          </a:effectRef>
+          <a:fontRef idx="minor">
+            <a:schemeClr val="lt1"/>
+          </a:fontRef>
+        </p:style>
+        <p:txBody>
+          <a:bodyPr rtlCol="0" anchor="ctr"/>
+          <a:lstStyle/>
+          <a:p>
+            <a:pPr algn="ctr"/>
+          </a:p>
+        </p:txBody>
+      </p:sp>
+      <p:sp>
+        <p:nvSpPr>
+          <p:cNvPr id="6" name="TextBox 5"/>
           <p:cNvSpPr txBox="1"/>
           <p:nvPr/>
         </p:nvSpPr>
         <p:spPr>
           <a:xfrm>
-            <a:off x="731520" y="1371600"/>
-            <a:ext cx="10698480" cy="5029200"/>
+            <a:off x="4572000" y="1554480"/>
+            <a:ext cx="2926080" cy="4480560"/>
           </a:xfrm>
           <a:prstGeom prst="rect">
             <a:avLst/>
@@ -4489,116 +7254,216 @@
           <a:noFill/>
         </p:spPr>
         <p:txBody>
-          <a:bodyPr wrap="square">
+          <a:bodyPr wrap="square" lIns="0" tIns="0" rIns="0" bIns="0">
             <a:spAutoFit/>
           </a:bodyPr>
           <a:lstStyle/>
           <a:p>
-            <a:pPr>
-              <a:spcBef>
-                <a:spcPts val="800"/>
-              </a:spcBef>
-              <a:defRPr sz="1500" b="1">
-                <a:solidFill>
-                  <a:srgbClr val="1E3A8A"/>
-                </a:solidFill>
-              </a:defRPr>
-            </a:pPr>
-            <a:r>
-              <a:t>⚙ Core Machine Learning Framework</a:t>
-            </a:r>
-          </a:p>
-          <a:p>
-            <a:pPr>
-              <a:defRPr sz="1300">
-                <a:solidFill>
-                  <a:srgbClr val="475569"/>
-                </a:solidFill>
-              </a:defRPr>
-            </a:pPr>
-            <a:r>
-              <a:t>PyTorch 2.0+ / Scikit-learn / HuggingFace Transformers / OpenCV</a:t>
-            </a:r>
-          </a:p>
-          <a:p>
-            <a:pPr>
-              <a:spcBef>
-                <a:spcPts val="800"/>
-              </a:spcBef>
-              <a:defRPr sz="1500" b="1">
-                <a:solidFill>
-                  <a:srgbClr val="1E3A8A"/>
-                </a:solidFill>
-              </a:defRPr>
-            </a:pPr>
-            <a:r>
-              <a:t>⚙ Asynchronous REST Backend</a:t>
-            </a:r>
-          </a:p>
-          <a:p>
-            <a:pPr>
-              <a:defRPr sz="1300">
-                <a:solidFill>
-                  <a:srgbClr val="475569"/>
-                </a:solidFill>
-              </a:defRPr>
-            </a:pPr>
-            <a:r>
-              <a:t>FastAPI / Uvicorn ASGI Server / Pydantic V2 Type Safety</a:t>
-            </a:r>
-          </a:p>
-          <a:p>
-            <a:pPr>
-              <a:spcBef>
-                <a:spcPts val="800"/>
-              </a:spcBef>
-              <a:defRPr sz="1500" b="1">
-                <a:solidFill>
-                  <a:srgbClr val="1E3A8A"/>
-                </a:solidFill>
-              </a:defRPr>
-            </a:pPr>
-            <a:r>
-              <a:t>⚙ Data Persistence &amp; Storage</a:t>
-            </a:r>
-          </a:p>
-          <a:p>
-            <a:pPr>
-              <a:defRPr sz="1300">
-                <a:solidFill>
-                  <a:srgbClr val="475569"/>
-                </a:solidFill>
-              </a:defRPr>
-            </a:pPr>
-            <a:r>
-              <a:t>SQLite / PostgreSQL with transactional integrity &amp; audit trail</a:t>
-            </a:r>
-          </a:p>
-          <a:p>
-            <a:pPr>
-              <a:spcBef>
-                <a:spcPts val="800"/>
-              </a:spcBef>
-              <a:defRPr sz="1500" b="1">
-                <a:solidFill>
-                  <a:srgbClr val="1E3A8A"/>
-                </a:solidFill>
-              </a:defRPr>
-            </a:pPr>
-            <a:r>
-              <a:t>⚙ Interactive Frontend Layer</a:t>
-            </a:r>
-          </a:p>
-          <a:p>
-            <a:pPr>
-              <a:defRPr sz="1300">
-                <a:solidFill>
-                  <a:srgbClr val="475569"/>
-                </a:solidFill>
-              </a:defRPr>
-            </a:pPr>
-            <a:r>
-              <a:t>Modern Responsive Web Portal (HTML5, Tailwind/CSS, JavaScript ES6+)</a:t>
+            <a:r>
+              <a:rPr b="1" sz="1300">
+                <a:solidFill>
+                  <a:srgbClr val="DC2626"/>
+                </a:solidFill>
+              </a:rPr>
+              <a:t>Corridor Archetypes</a:t>
+            </a:r>
+          </a:p>
+          <a:p>
+            <a:pPr>
+              <a:spcBef>
+                <a:spcPts val="600"/>
+              </a:spcBef>
+            </a:pPr>
+            <a:r>
+              <a:rPr sz="1000">
+                <a:solidFill>
+                  <a:srgbClr val="1E293B"/>
+                </a:solidFill>
+              </a:rPr>
+              <a:t>• 1. Interstate 101 North: High-speed expressway (110 km/h limit, multi-lane barrier intrusion).</a:t>
+            </a:r>
+          </a:p>
+          <a:p>
+            <a:pPr>
+              <a:spcBef>
+                <a:spcPts val="600"/>
+              </a:spcBef>
+            </a:pPr>
+            <a:r>
+              <a:rPr sz="1000">
+                <a:solidFill>
+                  <a:srgbClr val="1E293B"/>
+                </a:solidFill>
+              </a:rPr>
+              <a:t>• 2. Downtown Main &amp; 5th: Dense signalized grid (50 km/h limit, T-bone broadside collisions).</a:t>
+            </a:r>
+          </a:p>
+          <a:p>
+            <a:pPr>
+              <a:spcBef>
+                <a:spcPts val="600"/>
+              </a:spcBef>
+            </a:pPr>
+            <a:r>
+              <a:rPr sz="1000">
+                <a:solidFill>
+                  <a:srgbClr val="1E293B"/>
+                </a:solidFill>
+              </a:rPr>
+              <a:t>• 3. Route 9 Mountain Pass: High-curvature winding corridor (65 km/h limit, guardrail strikes).</a:t>
+            </a:r>
+          </a:p>
+          <a:p>
+            <a:pPr>
+              <a:spcBef>
+                <a:spcPts val="600"/>
+              </a:spcBef>
+            </a:pPr>
+            <a:r>
+              <a:rPr sz="1000">
+                <a:solidFill>
+                  <a:srgbClr val="1E293B"/>
+                </a:solidFill>
+              </a:rPr>
+              <a:t>• 4. Industrial Port Way: Freight logistics loop (45 km/h limit, heavy-truck rear-end hazards).</a:t>
+            </a:r>
+          </a:p>
+        </p:txBody>
+      </p:sp>
+      <p:sp>
+        <p:nvSpPr>
+          <p:cNvPr id="7" name="Rectangle 6"/>
+          <p:cNvSpPr/>
+          <p:nvPr/>
+        </p:nvSpPr>
+        <p:spPr>
+          <a:xfrm>
+            <a:off x="8046720" y="1371600"/>
+            <a:ext cx="3291840" cy="4846320"/>
+          </a:xfrm>
+          <a:prstGeom prst="rect">
+            <a:avLst/>
+          </a:prstGeom>
+          <a:solidFill>
+            <a:srgbClr val="FFFFFF"/>
+          </a:solidFill>
+          <a:ln w="12700">
+            <a:solidFill>
+              <a:srgbClr val="E2E8F0"/>
+            </a:solidFill>
+          </a:ln>
+        </p:spPr>
+        <p:style>
+          <a:lnRef idx="1">
+            <a:schemeClr val="accent1"/>
+          </a:lnRef>
+          <a:fillRef idx="3">
+            <a:schemeClr val="accent1"/>
+          </a:fillRef>
+          <a:effectRef idx="2">
+            <a:schemeClr val="accent1"/>
+          </a:effectRef>
+          <a:fontRef idx="minor">
+            <a:schemeClr val="lt1"/>
+          </a:fontRef>
+        </p:style>
+        <p:txBody>
+          <a:bodyPr rtlCol="0" anchor="ctr"/>
+          <a:lstStyle/>
+          <a:p>
+            <a:pPr algn="ctr"/>
+          </a:p>
+        </p:txBody>
+      </p:sp>
+      <p:sp>
+        <p:nvSpPr>
+          <p:cNvPr id="8" name="TextBox 7"/>
+          <p:cNvSpPr txBox="1"/>
+          <p:nvPr/>
+        </p:nvSpPr>
+        <p:spPr>
+          <a:xfrm>
+            <a:off x="8229600" y="1554480"/>
+            <a:ext cx="2926080" cy="4480560"/>
+          </a:xfrm>
+          <a:prstGeom prst="rect">
+            <a:avLst/>
+          </a:prstGeom>
+          <a:noFill/>
+        </p:spPr>
+        <p:txBody>
+          <a:bodyPr wrap="square" lIns="0" tIns="0" rIns="0" bIns="0">
+            <a:spAutoFit/>
+          </a:bodyPr>
+          <a:lstStyle/>
+          <a:p>
+            <a:r>
+              <a:rPr b="1" sz="1300">
+                <a:solidFill>
+                  <a:srgbClr val="DC2626"/>
+                </a:solidFill>
+              </a:rPr>
+              <a:t>Severity Breakdown</a:t>
+            </a:r>
+          </a:p>
+          <a:p>
+            <a:pPr>
+              <a:spcBef>
+                <a:spcPts val="600"/>
+              </a:spcBef>
+            </a:pPr>
+            <a:r>
+              <a:rPr sz="1000">
+                <a:solidFill>
+                  <a:srgbClr val="1E293B"/>
+                </a:solidFill>
+              </a:rPr>
+              <a:t>• Critical (5%): Catastrophic rollovers, multi-vehicle pileups, delta-V &gt; 70 km/h.</a:t>
+            </a:r>
+          </a:p>
+          <a:p>
+            <a:pPr>
+              <a:spcBef>
+                <a:spcPts val="600"/>
+              </a:spcBef>
+            </a:pPr>
+            <a:r>
+              <a:rPr sz="1000">
+                <a:solidFill>
+                  <a:srgbClr val="1E293B"/>
+                </a:solidFill>
+              </a:rPr>
+              <a:t>• Severe (15%): High-impact broadsides, guardrail breaches, delta-V 40-70 km/h.</a:t>
+            </a:r>
+          </a:p>
+          <a:p>
+            <a:pPr>
+              <a:spcBef>
+                <a:spcPts val="600"/>
+              </a:spcBef>
+            </a:pPr>
+            <a:r>
+              <a:rPr sz="1000">
+                <a:solidFill>
+                  <a:srgbClr val="1E293B"/>
+                </a:solidFill>
+              </a:rPr>
+              <a:t>• Moderate (25%): Low-speed collisions, bumper impacts, delta-V 20-40 km/h.</a:t>
+            </a:r>
+          </a:p>
+          <a:p>
+            <a:pPr>
+              <a:spcBef>
+                <a:spcPts val="600"/>
+              </a:spcBef>
+            </a:pPr>
+            <a:r>
+              <a:rPr sz="1000">
+                <a:solidFill>
+                  <a:srgbClr val="1E293B"/>
+                </a:solidFill>
+              </a:rPr>
+              <a:t>• Minor / Nominal (55%): Controlled hard braking, lane departures, minor scrapes.</a:t>
             </a:r>
           </a:p>
         </p:txBody>
@@ -4623,23 +7488,92 @@
       <p:grpSpPr/>
       <p:sp>
         <p:nvSpPr>
-          <p:cNvPr id="2" name="Rectangle 1"/>
+          <p:cNvPr id="2" name="TextBox 1"/>
+          <p:cNvSpPr txBox="1"/>
+          <p:nvPr/>
+        </p:nvSpPr>
+        <p:spPr>
+          <a:xfrm>
+            <a:off x="731520" y="365760"/>
+            <a:ext cx="10728655" cy="822960"/>
+          </a:xfrm>
+          <a:prstGeom prst="rect">
+            <a:avLst/>
+          </a:prstGeom>
+          <a:noFill/>
+        </p:spPr>
+        <p:txBody>
+          <a:bodyPr wrap="square" lIns="0" tIns="0" rIns="0" bIns="0">
+            <a:spAutoFit/>
+          </a:bodyPr>
+          <a:lstStyle/>
+          <a:p>
+            <a:r>
+              <a:rPr b="1" sz="1000">
+                <a:solidFill>
+                  <a:srgbClr val="DC2626"/>
+                </a:solidFill>
+              </a:rPr>
+              <a:t>CRITICAL EMERGENCY • PROJECT-055</a:t>
+            </a:r>
+          </a:p>
+          <a:p>
+            <a:r>
+              <a:rPr b="1" sz="2000">
+                <a:solidFill>
+                  <a:srgbClr val="0F172A"/>
+                </a:solidFill>
+              </a:rPr>
+              <a:t>Scenario A: High-Speed Interstate 101 Rollover Crash</a:t>
+            </a:r>
+          </a:p>
+        </p:txBody>
+      </p:sp>
+      <p:pic>
+        <p:nvPicPr>
+          <p:cNvPr id="3" name="Picture 2" descr="03_hwy101_rollover_critical_alert.png"/>
+          <p:cNvPicPr>
+            <a:picLocks noChangeAspect="1"/>
+          </p:cNvPicPr>
+          <p:nvPr/>
+        </p:nvPicPr>
+        <p:blipFill>
+          <a:blip r:embed="rId2"/>
+          <a:stretch>
+            <a:fillRect/>
+          </a:stretch>
+        </p:blipFill>
+        <p:spPr>
+          <a:xfrm>
+            <a:off x="731520" y="1371600"/>
+            <a:ext cx="6858000" cy="4846320"/>
+          </a:xfrm>
+          <a:prstGeom prst="rect">
+            <a:avLst/>
+          </a:prstGeom>
+        </p:spPr>
+      </p:pic>
+      <p:sp>
+        <p:nvSpPr>
+          <p:cNvPr id="4" name="Rectangle 3"/>
           <p:cNvSpPr/>
           <p:nvPr/>
         </p:nvSpPr>
         <p:spPr>
           <a:xfrm>
-            <a:off x="0" y="0"/>
-            <a:ext cx="12191695" cy="1097280"/>
+            <a:off x="7863840" y="1371600"/>
+            <a:ext cx="3566160" cy="4846320"/>
           </a:xfrm>
           <a:prstGeom prst="rect">
             <a:avLst/>
           </a:prstGeom>
           <a:solidFill>
-            <a:srgbClr val="0F172A"/>
+            <a:srgbClr val="FFFFFF"/>
           </a:solidFill>
-          <a:ln>
-            <a:noFill/>
+          <a:ln w="12700">
+            <a:solidFill>
+              <a:srgbClr val="E2E8F0"/>
+            </a:solidFill>
           </a:ln>
         </p:spPr>
         <p:style>
@@ -4666,14 +7600,14 @@
       </p:sp>
       <p:sp>
         <p:nvSpPr>
-          <p:cNvPr id="3" name="TextBox 2"/>
+          <p:cNvPr id="5" name="TextBox 4"/>
           <p:cNvSpPr txBox="1"/>
           <p:nvPr/>
         </p:nvSpPr>
         <p:spPr>
           <a:xfrm>
-            <a:off x="731520" y="137160"/>
-            <a:ext cx="10698480" cy="822960"/>
+            <a:off x="8046720" y="1554480"/>
+            <a:ext cx="3200400" cy="4480560"/>
           </a:xfrm>
           <a:prstGeom prst="rect">
             <a:avLst/>
@@ -4681,46 +7615,125 @@
           <a:noFill/>
         </p:spPr>
         <p:txBody>
-          <a:bodyPr wrap="square">
+          <a:bodyPr wrap="square" lIns="0" tIns="0" rIns="0" bIns="0">
             <a:spAutoFit/>
           </a:bodyPr>
           <a:lstStyle/>
           <a:p>
-            <a:pPr>
-              <a:defRPr sz="2400" b="1">
-                <a:solidFill>
-                  <a:srgbClr val="FFFFFF"/>
-                </a:solidFill>
-              </a:defRPr>
-            </a:pPr>
-            <a:r>
-              <a:t>7. Conclusion &amp; Future Roadmap</a:t>
-            </a:r>
-          </a:p>
-          <a:p>
-            <a:pPr>
-              <a:defRPr sz="1100">
-                <a:solidFill>
-                  <a:srgbClr val="94A3B8"/>
-                </a:solidFill>
-              </a:defRPr>
-            </a:pPr>
-            <a:r>
-              <a:t>Academic &amp; Industrial AI Project Series  |  Project 55 of 55</a:t>
-            </a:r>
-          </a:p>
-        </p:txBody>
-      </p:sp>
-      <p:sp>
-        <p:nvSpPr>
-          <p:cNvPr id="4" name="TextBox 3"/>
+            <a:r>
+              <a:rPr b="1" sz="1300">
+                <a:solidFill>
+                  <a:srgbClr val="DC2626"/>
+                </a:solidFill>
+              </a:rPr>
+              <a:t>Emergency Dispatch Details</a:t>
+            </a:r>
+          </a:p>
+          <a:p>
+            <a:pPr>
+              <a:spcBef>
+                <a:spcPts val="600"/>
+              </a:spcBef>
+            </a:pPr>
+            <a:r>
+              <a:rPr sz="1000">
+                <a:solidFill>
+                  <a:srgbClr val="1E293B"/>
+                </a:solidFill>
+              </a:rPr>
+              <a:t>• Telemetry: 4.8g deceleration, 180° vehicle inversion, 14.5m lateral offset, 340 kN impact force.</a:t>
+            </a:r>
+          </a:p>
+          <a:p>
+            <a:pPr>
+              <a:spcBef>
+                <a:spcPts val="600"/>
+              </a:spcBef>
+            </a:pPr>
+            <a:r>
+              <a:rPr sz="1000">
+                <a:solidFill>
+                  <a:srgbClr val="1E293B"/>
+                </a:solidFill>
+              </a:rPr>
+              <a:t>• Dual-Model Output: Severity 94.2/100, Delta-V 82.0 km/h, Casualty Risk 91.4%, Confidence 99.2%.</a:t>
+            </a:r>
+          </a:p>
+          <a:p>
+            <a:pPr>
+              <a:spcBef>
+                <a:spcPts val="600"/>
+              </a:spcBef>
+            </a:pPr>
+            <a:r>
+              <a:rPr sz="1000">
+                <a:solidFill>
+                  <a:srgbClr val="1E293B"/>
+                </a:solidFill>
+              </a:rPr>
+              <a:t>• Automated Level-1 Trauma Alert dispatched via CAD webhook in 380 ms.</a:t>
+            </a:r>
+          </a:p>
+          <a:p>
+            <a:pPr>
+              <a:spcBef>
+                <a:spcPts val="600"/>
+              </a:spcBef>
+            </a:pPr>
+            <a:r>
+              <a:rPr sz="1000">
+                <a:solidFill>
+                  <a:srgbClr val="1E293B"/>
+                </a:solidFill>
+              </a:rPr>
+              <a:t>• Dispatched Units: Paramedic Medic Unit 1, Heavy Rescue Engine 12, Highway Patrol Interceptor 44.</a:t>
+            </a:r>
+          </a:p>
+          <a:p>
+            <a:pPr>
+              <a:spcBef>
+                <a:spcPts val="600"/>
+              </a:spcBef>
+            </a:pPr>
+            <a:r>
+              <a:rPr sz="1000">
+                <a:solidFill>
+                  <a:srgbClr val="1E293B"/>
+                </a:solidFill>
+              </a:rPr>
+              <a:t>• Automated CAD ETA estimation: 4.2 minutes.</a:t>
+            </a:r>
+          </a:p>
+        </p:txBody>
+      </p:sp>
+    </p:spTree>
+  </p:cSld>
+  <p:clrMapOvr>
+    <a:masterClrMapping/>
+  </p:clrMapOvr>
+</p:sld>
+</file>
+
+<file path=ppt/slides/slide9.xml><?xml version="1.0" encoding="utf-8"?>
+<p:sld xmlns:a="http://schemas.openxmlformats.org/drawingml/2006/main" xmlns:p="http://schemas.openxmlformats.org/presentationml/2006/main" xmlns:r="http://schemas.openxmlformats.org/officeDocument/2006/relationships">
+  <p:cSld>
+    <p:spTree>
+      <p:nvGrpSpPr>
+        <p:cNvPr id="1" name=""/>
+        <p:cNvGrpSpPr/>
+        <p:nvPr/>
+      </p:nvGrpSpPr>
+      <p:grpSpPr/>
+      <p:sp>
+        <p:nvSpPr>
+          <p:cNvPr id="2" name="TextBox 1"/>
           <p:cNvSpPr txBox="1"/>
           <p:nvPr/>
         </p:nvSpPr>
         <p:spPr>
           <a:xfrm>
-            <a:off x="731520" y="1371600"/>
-            <a:ext cx="10698480" cy="5029200"/>
+            <a:off x="731520" y="365760"/>
+            <a:ext cx="10728655" cy="822960"/>
           </a:xfrm>
           <a:prstGeom prst="rect">
             <a:avLst/>
@@ -4728,89 +7741,205 @@
           <a:noFill/>
         </p:spPr>
         <p:txBody>
-          <a:bodyPr wrap="square">
+          <a:bodyPr wrap="square" lIns="0" tIns="0" rIns="0" bIns="0">
             <a:spAutoFit/>
           </a:bodyPr>
           <a:lstStyle/>
           <a:p>
-            <a:pPr>
-              <a:spcBef>
-                <a:spcPts val="1000"/>
-              </a:spcBef>
-              <a:defRPr sz="1500" b="1">
+            <a:r>
+              <a:rPr b="1" sz="1000">
+                <a:solidFill>
+                  <a:srgbClr val="DC2626"/>
+                </a:solidFill>
+              </a:rPr>
+              <a:t>URBAN SCENARIO • PROJECT-055</a:t>
+            </a:r>
+          </a:p>
+          <a:p>
+            <a:r>
+              <a:rPr b="1" sz="2000">
                 <a:solidFill>
                   <a:srgbClr val="0F172A"/>
                 </a:solidFill>
-              </a:defRPr>
-            </a:pPr>
-            <a:r>
-              <a:t>■ Project Accomplishments</a:t>
-            </a:r>
-          </a:p>
-          <a:p>
-            <a:pPr>
-              <a:defRPr sz="1300">
-                <a:solidFill>
-                  <a:srgbClr val="475569"/>
-                </a:solidFill>
-              </a:defRPr>
-            </a:pPr>
-            <a:r>
-              <a:t>Engineered a robust, end-to-end prototype validating the initial abstract with reproducible experiments.</a:t>
-            </a:r>
-          </a:p>
-          <a:p>
-            <a:pPr>
-              <a:spcBef>
-                <a:spcPts val="1000"/>
-              </a:spcBef>
-              <a:defRPr sz="1500" b="1">
-                <a:solidFill>
-                  <a:srgbClr val="0F172A"/>
-                </a:solidFill>
-              </a:defRPr>
-            </a:pPr>
-            <a:r>
-              <a:t>■ Industrial Significance</a:t>
-            </a:r>
-          </a:p>
-          <a:p>
-            <a:pPr>
-              <a:defRPr sz="1300">
-                <a:solidFill>
-                  <a:srgbClr val="475569"/>
-                </a:solidFill>
-              </a:defRPr>
-            </a:pPr>
-            <a:r>
-              <a:t>Eliminates latency and manual friction while ensuring high confidence automated decision support.</a:t>
-            </a:r>
-          </a:p>
-          <a:p>
-            <a:pPr>
-              <a:spcBef>
-                <a:spcPts val="1000"/>
-              </a:spcBef>
-              <a:defRPr sz="1500" b="1">
-                <a:solidFill>
-                  <a:srgbClr val="0F172A"/>
-                </a:solidFill>
-              </a:defRPr>
-            </a:pPr>
-            <a:r>
-              <a:t>■ Future Scope &amp; Extensions</a:t>
-            </a:r>
-          </a:p>
-          <a:p>
-            <a:pPr>
-              <a:defRPr sz="1300">
-                <a:solidFill>
-                  <a:srgbClr val="475569"/>
-                </a:solidFill>
-              </a:defRPr>
-            </a:pPr>
-            <a:r>
-              <a:t>Integration with federated edge sensors, distributed multi-tenant cloud clustering, and automated active learning.</a:t>
+              </a:rPr>
+              <a:t>Scenario B: Downtown 5th Ave Multi-Vehicle T-Bone</a:t>
+            </a:r>
+          </a:p>
+        </p:txBody>
+      </p:sp>
+      <p:pic>
+        <p:nvPicPr>
+          <p:cNvPr id="3" name="Picture 2" descr="04_urban_tbone_collision_dispatch.png"/>
+          <p:cNvPicPr>
+            <a:picLocks noChangeAspect="1"/>
+          </p:cNvPicPr>
+          <p:nvPr/>
+        </p:nvPicPr>
+        <p:blipFill>
+          <a:blip r:embed="rId2"/>
+          <a:stretch>
+            <a:fillRect/>
+          </a:stretch>
+        </p:blipFill>
+        <p:spPr>
+          <a:xfrm>
+            <a:off x="731520" y="1371600"/>
+            <a:ext cx="6858000" cy="4846320"/>
+          </a:xfrm>
+          <a:prstGeom prst="rect">
+            <a:avLst/>
+          </a:prstGeom>
+        </p:spPr>
+      </p:pic>
+      <p:sp>
+        <p:nvSpPr>
+          <p:cNvPr id="4" name="Rectangle 3"/>
+          <p:cNvSpPr/>
+          <p:nvPr/>
+        </p:nvSpPr>
+        <p:spPr>
+          <a:xfrm>
+            <a:off x="7863840" y="1371600"/>
+            <a:ext cx="3566160" cy="4846320"/>
+          </a:xfrm>
+          <a:prstGeom prst="rect">
+            <a:avLst/>
+          </a:prstGeom>
+          <a:solidFill>
+            <a:srgbClr val="FFFFFF"/>
+          </a:solidFill>
+          <a:ln w="12700">
+            <a:solidFill>
+              <a:srgbClr val="E2E8F0"/>
+            </a:solidFill>
+          </a:ln>
+        </p:spPr>
+        <p:style>
+          <a:lnRef idx="1">
+            <a:schemeClr val="accent1"/>
+          </a:lnRef>
+          <a:fillRef idx="3">
+            <a:schemeClr val="accent1"/>
+          </a:fillRef>
+          <a:effectRef idx="2">
+            <a:schemeClr val="accent1"/>
+          </a:effectRef>
+          <a:fontRef idx="minor">
+            <a:schemeClr val="lt1"/>
+          </a:fontRef>
+        </p:style>
+        <p:txBody>
+          <a:bodyPr rtlCol="0" anchor="ctr"/>
+          <a:lstStyle/>
+          <a:p>
+            <a:pPr algn="ctr"/>
+          </a:p>
+        </p:txBody>
+      </p:sp>
+      <p:sp>
+        <p:nvSpPr>
+          <p:cNvPr id="5" name="TextBox 4"/>
+          <p:cNvSpPr txBox="1"/>
+          <p:nvPr/>
+        </p:nvSpPr>
+        <p:spPr>
+          <a:xfrm>
+            <a:off x="8046720" y="1554480"/>
+            <a:ext cx="3200400" cy="4480560"/>
+          </a:xfrm>
+          <a:prstGeom prst="rect">
+            <a:avLst/>
+          </a:prstGeom>
+          <a:noFill/>
+        </p:spPr>
+        <p:txBody>
+          <a:bodyPr wrap="square" lIns="0" tIns="0" rIns="0" bIns="0">
+            <a:spAutoFit/>
+          </a:bodyPr>
+          <a:lstStyle/>
+          <a:p>
+            <a:r>
+              <a:rPr b="1" sz="1300">
+                <a:solidFill>
+                  <a:srgbClr val="DC2626"/>
+                </a:solidFill>
+              </a:rPr>
+              <a:t>Urban Collision Response</a:t>
+            </a:r>
+          </a:p>
+          <a:p>
+            <a:pPr>
+              <a:spcBef>
+                <a:spcPts val="600"/>
+              </a:spcBef>
+            </a:pPr>
+            <a:r>
+              <a:rPr sz="1000">
+                <a:solidFill>
+                  <a:srgbClr val="1E293B"/>
+                </a:solidFill>
+              </a:rPr>
+              <a:t>• Scenario: Broadside T-bone collision involving 3 vehicles in dense signalized intersection box.</a:t>
+            </a:r>
+          </a:p>
+          <a:p>
+            <a:pPr>
+              <a:spcBef>
+                <a:spcPts val="600"/>
+              </a:spcBef>
+            </a:pPr>
+            <a:r>
+              <a:rPr sz="1000">
+                <a:solidFill>
+                  <a:srgbClr val="1E293B"/>
+                </a:solidFill>
+              </a:rPr>
+              <a:t>• Kinematics: 3.9g deceleration, 92° yaw deflection, 260 kN force, 38s post-impact immobility.</a:t>
+            </a:r>
+          </a:p>
+          <a:p>
+            <a:pPr>
+              <a:spcBef>
+                <a:spcPts val="600"/>
+              </a:spcBef>
+            </a:pPr>
+            <a:r>
+              <a:rPr sz="1000">
+                <a:solidFill>
+                  <a:srgbClr val="1E293B"/>
+                </a:solidFill>
+              </a:rPr>
+              <a:t>• Severity Index: 88.5/100 | Delta-V: 55.0 km/h | Casualty Probability: 78.2%.</a:t>
+            </a:r>
+          </a:p>
+          <a:p>
+            <a:pPr>
+              <a:spcBef>
+                <a:spcPts val="600"/>
+              </a:spcBef>
+            </a:pPr>
+            <a:r>
+              <a:rPr sz="1000">
+                <a:solidFill>
+                  <a:srgbClr val="1E293B"/>
+                </a:solidFill>
+              </a:rPr>
+              <a:t>• Dispatched Units: Medic 1, Medic 2, Engine 13, Traffic Control Unit 5.</a:t>
+            </a:r>
+          </a:p>
+          <a:p>
+            <a:pPr>
+              <a:spcBef>
+                <a:spcPts val="600"/>
+              </a:spcBef>
+            </a:pPr>
+            <a:r>
+              <a:rPr sz="1000">
+                <a:solidFill>
+                  <a:srgbClr val="1E293B"/>
+                </a:solidFill>
+              </a:rPr>
+              <a:t>• Automated traffic signal preemption triggered to clear emergency ingress lanes.</a:t>
             </a:r>
           </a:p>
         </p:txBody>
